--- a/slides/day2_slides.pptx
+++ b/slides/day2_slides.pptx
@@ -15,9 +15,9 @@
     <p:sldId id="307" r:id="rId6"/>
     <p:sldId id="301" r:id="rId7"/>
     <p:sldId id="302" r:id="rId8"/>
-    <p:sldId id="304" r:id="rId9"/>
-    <p:sldId id="303" r:id="rId10"/>
-    <p:sldId id="305" r:id="rId11"/>
+    <p:sldId id="303" r:id="rId9"/>
+    <p:sldId id="305" r:id="rId10"/>
+    <p:sldId id="311" r:id="rId11"/>
     <p:sldId id="289" r:id="rId12"/>
     <p:sldId id="290" r:id="rId13"/>
     <p:sldId id="291" r:id="rId14"/>
@@ -273,7 +273,7 @@
       <p15:sldGuideLst xmlns:p15="http://schemas.microsoft.com/office/powerpoint/2012/main"/>
     </p:ext>
     <p:ext uri="GoogleSlidesCustomDataVersion2">
-      <go:slidesCustomData xmlns="" xmlns:mc="http://schemas.openxmlformats.org/markup-compatibility/2006" xmlns:mv="urn:schemas-microsoft-com:mac:vml" xmlns:c="http://schemas.openxmlformats.org/drawingml/2006/chart" xmlns:dgm="http://schemas.openxmlformats.org/drawingml/2006/diagram" xmlns:o="urn:schemas-microsoft-com:office:office" xmlns:v="urn:schemas-microsoft-com:vml" xmlns:pvml="urn:schemas-microsoft-com:office:powerpoint" xmlns:com="http://schemas.openxmlformats.org/drawingml/2006/compatibility" xmlns:p14="http://schemas.microsoft.com/office/powerpoint/2010/main" xmlns:p15="http://schemas.microsoft.com/office/powerpoint/2012/main" xmlns:ahyp="http://schemas.microsoft.com/office/drawing/2018/hyperlinkcolor" xmlns:go="http://customooxmlschemas.google.com/" r:id="rId44" roundtripDataSignature="AMtx7mi14jFXTrCmS0u2hXQXGuC3zsnMBA=="/>
+      <go:slidesCustomData xmlns:go="http://customooxmlschemas.google.com/" xmlns:ahyp="http://schemas.microsoft.com/office/drawing/2018/hyperlinkcolor" xmlns:p15="http://schemas.microsoft.com/office/powerpoint/2012/main" xmlns:p14="http://schemas.microsoft.com/office/powerpoint/2010/main" xmlns:com="http://schemas.openxmlformats.org/drawingml/2006/compatibility" xmlns:pvml="urn:schemas-microsoft-com:office:powerpoint" xmlns:v="urn:schemas-microsoft-com:vml" xmlns:o="urn:schemas-microsoft-com:office:office" xmlns:dgm="http://schemas.openxmlformats.org/drawingml/2006/diagram" xmlns:c="http://schemas.openxmlformats.org/drawingml/2006/chart" xmlns:mv="urn:schemas-microsoft-com:mac:vml" xmlns:mc="http://schemas.openxmlformats.org/markup-compatibility/2006" xmlns="" r:id="rId44" roundtripDataSignature="AMtx7mi14jFXTrCmS0u2hXQXGuC3zsnMBA=="/>
     </p:ext>
   </p:extLst>
 </p:presentation>
@@ -1747,10 +1747,30 @@
               <a:buNone/>
             </a:pPr>
             <a:r>
-              <a:rPr lang="en-US"/>
-              <a:t>https://wiki.python.org/moin/TimeComplexity</a:t>
+              <a:rPr lang="en-US" dirty="0"/>
+              <a:t>https://</a:t>
             </a:r>
-            <a:endParaRPr/>
+            <a:r>
+              <a:rPr lang="en-US" dirty="0" err="1"/>
+              <a:t>wiki.python.org</a:t>
+            </a:r>
+            <a:r>
+              <a:rPr lang="en-US" dirty="0"/>
+              <a:t>/</a:t>
+            </a:r>
+            <a:r>
+              <a:rPr lang="en-US" dirty="0" err="1"/>
+              <a:t>moin</a:t>
+            </a:r>
+            <a:r>
+              <a:rPr lang="en-US" dirty="0"/>
+              <a:t>/</a:t>
+            </a:r>
+            <a:r>
+              <a:rPr lang="en-US" dirty="0" err="1"/>
+              <a:t>TimeComplexity</a:t>
+            </a:r>
+            <a:endParaRPr dirty="0"/>
           </a:p>
         </p:txBody>
       </p:sp>
@@ -1974,10 +1994,30 @@
               <a:buNone/>
             </a:pPr>
             <a:r>
-              <a:rPr lang="en-US"/>
-              <a:t>https://wiki.python.org/moin/TimeComplexity</a:t>
+              <a:rPr lang="en-US" dirty="0"/>
+              <a:t>https://</a:t>
             </a:r>
-            <a:endParaRPr/>
+            <a:r>
+              <a:rPr lang="en-US" dirty="0" err="1"/>
+              <a:t>wiki.python.org</a:t>
+            </a:r>
+            <a:r>
+              <a:rPr lang="en-US" dirty="0"/>
+              <a:t>/</a:t>
+            </a:r>
+            <a:r>
+              <a:rPr lang="en-US" dirty="0" err="1"/>
+              <a:t>moin</a:t>
+            </a:r>
+            <a:r>
+              <a:rPr lang="en-US" dirty="0"/>
+              <a:t>/</a:t>
+            </a:r>
+            <a:r>
+              <a:rPr lang="en-US" dirty="0" err="1"/>
+              <a:t>TimeComplexity</a:t>
+            </a:r>
+            <a:endParaRPr dirty="0"/>
           </a:p>
         </p:txBody>
       </p:sp>
@@ -2201,10 +2241,30 @@
               <a:buNone/>
             </a:pPr>
             <a:r>
-              <a:rPr lang="en-US"/>
-              <a:t>https://wiki.python.org/moin/TimeComplexity</a:t>
+              <a:rPr lang="en-US" dirty="0"/>
+              <a:t>https://</a:t>
             </a:r>
-            <a:endParaRPr/>
+            <a:r>
+              <a:rPr lang="en-US" dirty="0" err="1"/>
+              <a:t>wiki.python.org</a:t>
+            </a:r>
+            <a:r>
+              <a:rPr lang="en-US" dirty="0"/>
+              <a:t>/</a:t>
+            </a:r>
+            <a:r>
+              <a:rPr lang="en-US" dirty="0" err="1"/>
+              <a:t>moin</a:t>
+            </a:r>
+            <a:r>
+              <a:rPr lang="en-US" dirty="0"/>
+              <a:t>/</a:t>
+            </a:r>
+            <a:r>
+              <a:rPr lang="en-US" dirty="0" err="1"/>
+              <a:t>TimeComplexity</a:t>
+            </a:r>
+            <a:endParaRPr dirty="0"/>
           </a:p>
         </p:txBody>
       </p:sp>
@@ -2651,10 +2711,30 @@
               <a:buNone/>
             </a:pPr>
             <a:r>
-              <a:rPr lang="en-US"/>
-              <a:t>https://wiki.python.org/moin/TimeComplexity</a:t>
+              <a:rPr lang="en-US" dirty="0"/>
+              <a:t>https://</a:t>
             </a:r>
-            <a:endParaRPr/>
+            <a:r>
+              <a:rPr lang="en-US" dirty="0" err="1"/>
+              <a:t>wiki.python.org</a:t>
+            </a:r>
+            <a:r>
+              <a:rPr lang="en-US" dirty="0"/>
+              <a:t>/</a:t>
+            </a:r>
+            <a:r>
+              <a:rPr lang="en-US" dirty="0" err="1"/>
+              <a:t>moin</a:t>
+            </a:r>
+            <a:r>
+              <a:rPr lang="en-US" dirty="0"/>
+              <a:t>/</a:t>
+            </a:r>
+            <a:r>
+              <a:rPr lang="en-US" dirty="0" err="1"/>
+              <a:t>TimeComplexity</a:t>
+            </a:r>
+            <a:endParaRPr dirty="0"/>
           </a:p>
         </p:txBody>
       </p:sp>
@@ -2878,10 +2958,30 @@
               <a:buNone/>
             </a:pPr>
             <a:r>
-              <a:rPr lang="en-US"/>
-              <a:t>https://wiki.python.org/moin/TimeComplexity</a:t>
+              <a:rPr lang="en-US" dirty="0"/>
+              <a:t>https://</a:t>
             </a:r>
-            <a:endParaRPr/>
+            <a:r>
+              <a:rPr lang="en-US" dirty="0" err="1"/>
+              <a:t>wiki.python.org</a:t>
+            </a:r>
+            <a:r>
+              <a:rPr lang="en-US" dirty="0"/>
+              <a:t>/</a:t>
+            </a:r>
+            <a:r>
+              <a:rPr lang="en-US" dirty="0" err="1"/>
+              <a:t>moin</a:t>
+            </a:r>
+            <a:r>
+              <a:rPr lang="en-US" dirty="0"/>
+              <a:t>/</a:t>
+            </a:r>
+            <a:r>
+              <a:rPr lang="en-US" dirty="0" err="1"/>
+              <a:t>TimeComplexity</a:t>
+            </a:r>
+            <a:endParaRPr dirty="0"/>
           </a:p>
         </p:txBody>
       </p:sp>
@@ -3105,10 +3205,30 @@
               <a:buNone/>
             </a:pPr>
             <a:r>
-              <a:rPr lang="en-US"/>
-              <a:t>https://wiki.python.org/moin/TimeComplexity</a:t>
+              <a:rPr lang="en-US" dirty="0"/>
+              <a:t>https://</a:t>
             </a:r>
-            <a:endParaRPr/>
+            <a:r>
+              <a:rPr lang="en-US" dirty="0" err="1"/>
+              <a:t>wiki.python.org</a:t>
+            </a:r>
+            <a:r>
+              <a:rPr lang="en-US" dirty="0"/>
+              <a:t>/</a:t>
+            </a:r>
+            <a:r>
+              <a:rPr lang="en-US" dirty="0" err="1"/>
+              <a:t>moin</a:t>
+            </a:r>
+            <a:r>
+              <a:rPr lang="en-US" dirty="0"/>
+              <a:t>/</a:t>
+            </a:r>
+            <a:r>
+              <a:rPr lang="en-US" dirty="0" err="1"/>
+              <a:t>TimeComplexity</a:t>
+            </a:r>
+            <a:endParaRPr dirty="0"/>
           </a:p>
         </p:txBody>
       </p:sp>
@@ -3346,10 +3466,30 @@
               <a:buNone/>
             </a:pPr>
             <a:r>
-              <a:rPr lang="en-US"/>
-              <a:t>https://wiki.python.org/moin/TimeComplexity</a:t>
+              <a:rPr lang="en-US" dirty="0"/>
+              <a:t>https://</a:t>
             </a:r>
-            <a:endParaRPr/>
+            <a:r>
+              <a:rPr lang="en-US" dirty="0" err="1"/>
+              <a:t>wiki.python.org</a:t>
+            </a:r>
+            <a:r>
+              <a:rPr lang="en-US" dirty="0"/>
+              <a:t>/</a:t>
+            </a:r>
+            <a:r>
+              <a:rPr lang="en-US" dirty="0" err="1"/>
+              <a:t>moin</a:t>
+            </a:r>
+            <a:r>
+              <a:rPr lang="en-US" dirty="0"/>
+              <a:t>/</a:t>
+            </a:r>
+            <a:r>
+              <a:rPr lang="en-US" dirty="0" err="1"/>
+              <a:t>TimeComplexity</a:t>
+            </a:r>
+            <a:endParaRPr dirty="0"/>
           </a:p>
         </p:txBody>
       </p:sp>
@@ -3543,10 +3683,30 @@
               <a:buNone/>
             </a:pPr>
             <a:r>
-              <a:rPr lang="en-US"/>
-              <a:t>https://wiki.python.org/moin/TimeComplexity</a:t>
+              <a:rPr lang="en-US" dirty="0"/>
+              <a:t>https://</a:t>
             </a:r>
-            <a:endParaRPr/>
+            <a:r>
+              <a:rPr lang="en-US" dirty="0" err="1"/>
+              <a:t>wiki.python.org</a:t>
+            </a:r>
+            <a:r>
+              <a:rPr lang="en-US" dirty="0"/>
+              <a:t>/</a:t>
+            </a:r>
+            <a:r>
+              <a:rPr lang="en-US" dirty="0" err="1"/>
+              <a:t>moin</a:t>
+            </a:r>
+            <a:r>
+              <a:rPr lang="en-US" dirty="0"/>
+              <a:t>/</a:t>
+            </a:r>
+            <a:r>
+              <a:rPr lang="en-US" dirty="0" err="1"/>
+              <a:t>TimeComplexity</a:t>
+            </a:r>
+            <a:endParaRPr dirty="0"/>
           </a:p>
         </p:txBody>
       </p:sp>
@@ -3740,10 +3900,30 @@
               <a:buNone/>
             </a:pPr>
             <a:r>
-              <a:rPr lang="en-US"/>
-              <a:t>https://wiki.python.org/moin/TimeComplexity</a:t>
+              <a:rPr lang="en-US" dirty="0"/>
+              <a:t>https://</a:t>
             </a:r>
-            <a:endParaRPr/>
+            <a:r>
+              <a:rPr lang="en-US" dirty="0" err="1"/>
+              <a:t>wiki.python.org</a:t>
+            </a:r>
+            <a:r>
+              <a:rPr lang="en-US" dirty="0"/>
+              <a:t>/</a:t>
+            </a:r>
+            <a:r>
+              <a:rPr lang="en-US" dirty="0" err="1"/>
+              <a:t>moin</a:t>
+            </a:r>
+            <a:r>
+              <a:rPr lang="en-US" dirty="0"/>
+              <a:t>/</a:t>
+            </a:r>
+            <a:r>
+              <a:rPr lang="en-US" dirty="0" err="1"/>
+              <a:t>TimeComplexity</a:t>
+            </a:r>
+            <a:endParaRPr dirty="0"/>
           </a:p>
         </p:txBody>
       </p:sp>
@@ -3937,10 +4117,30 @@
               <a:buNone/>
             </a:pPr>
             <a:r>
-              <a:rPr lang="en-US"/>
-              <a:t>https://wiki.python.org/moin/TimeComplexity</a:t>
+              <a:rPr lang="en-US" dirty="0"/>
+              <a:t>https://</a:t>
             </a:r>
-            <a:endParaRPr/>
+            <a:r>
+              <a:rPr lang="en-US" dirty="0" err="1"/>
+              <a:t>wiki.python.org</a:t>
+            </a:r>
+            <a:r>
+              <a:rPr lang="en-US" dirty="0"/>
+              <a:t>/</a:t>
+            </a:r>
+            <a:r>
+              <a:rPr lang="en-US" dirty="0" err="1"/>
+              <a:t>moin</a:t>
+            </a:r>
+            <a:r>
+              <a:rPr lang="en-US" dirty="0"/>
+              <a:t>/</a:t>
+            </a:r>
+            <a:r>
+              <a:rPr lang="en-US" dirty="0" err="1"/>
+              <a:t>TimeComplexity</a:t>
+            </a:r>
+            <a:endParaRPr dirty="0"/>
           </a:p>
         </p:txBody>
       </p:sp>
@@ -4134,10 +4334,30 @@
               <a:buNone/>
             </a:pPr>
             <a:r>
-              <a:rPr lang="en-US"/>
-              <a:t>https://wiki.python.org/moin/TimeComplexity</a:t>
+              <a:rPr lang="en-US" dirty="0"/>
+              <a:t>https://</a:t>
             </a:r>
-            <a:endParaRPr/>
+            <a:r>
+              <a:rPr lang="en-US" dirty="0" err="1"/>
+              <a:t>wiki.python.org</a:t>
+            </a:r>
+            <a:r>
+              <a:rPr lang="en-US" dirty="0"/>
+              <a:t>/</a:t>
+            </a:r>
+            <a:r>
+              <a:rPr lang="en-US" dirty="0" err="1"/>
+              <a:t>moin</a:t>
+            </a:r>
+            <a:r>
+              <a:rPr lang="en-US" dirty="0"/>
+              <a:t>/</a:t>
+            </a:r>
+            <a:r>
+              <a:rPr lang="en-US" dirty="0" err="1"/>
+              <a:t>TimeComplexity</a:t>
+            </a:r>
+            <a:endParaRPr dirty="0"/>
           </a:p>
         </p:txBody>
       </p:sp>
@@ -4331,10 +4551,30 @@
               <a:buNone/>
             </a:pPr>
             <a:r>
-              <a:rPr lang="en-US"/>
-              <a:t>https://wiki.python.org/moin/TimeComplexity</a:t>
+              <a:rPr lang="en-US" dirty="0"/>
+              <a:t>https://</a:t>
             </a:r>
-            <a:endParaRPr/>
+            <a:r>
+              <a:rPr lang="en-US" dirty="0" err="1"/>
+              <a:t>wiki.python.org</a:t>
+            </a:r>
+            <a:r>
+              <a:rPr lang="en-US" dirty="0"/>
+              <a:t>/</a:t>
+            </a:r>
+            <a:r>
+              <a:rPr lang="en-US" dirty="0" err="1"/>
+              <a:t>moin</a:t>
+            </a:r>
+            <a:r>
+              <a:rPr lang="en-US" dirty="0"/>
+              <a:t>/</a:t>
+            </a:r>
+            <a:r>
+              <a:rPr lang="en-US" dirty="0" err="1"/>
+              <a:t>TimeComplexity</a:t>
+            </a:r>
+            <a:endParaRPr dirty="0"/>
           </a:p>
         </p:txBody>
       </p:sp>
@@ -4514,30 +4754,30 @@
               <a:buNone/>
             </a:pPr>
             <a:r>
-              <a:rPr lang="en-US"/>
+              <a:rPr lang="en-US" dirty="0"/>
               <a:t>https://</a:t>
             </a:r>
             <a:r>
-              <a:rPr lang="en-US" err="1"/>
+              <a:rPr lang="en-US" dirty="0" err="1"/>
               <a:t>wiki.python.org</a:t>
             </a:r>
             <a:r>
-              <a:rPr lang="en-US"/>
+              <a:rPr lang="en-US" dirty="0"/>
               <a:t>/</a:t>
             </a:r>
             <a:r>
-              <a:rPr lang="en-US" err="1"/>
+              <a:rPr lang="en-US" dirty="0" err="1"/>
               <a:t>moin</a:t>
             </a:r>
             <a:r>
-              <a:rPr lang="en-US"/>
+              <a:rPr lang="en-US" dirty="0"/>
               <a:t>/</a:t>
             </a:r>
             <a:r>
-              <a:rPr lang="en-US" err="1"/>
+              <a:rPr lang="en-US" dirty="0" err="1"/>
               <a:t>TimeComplexity</a:t>
             </a:r>
-            <a:endParaRPr/>
+            <a:endParaRPr dirty="0"/>
           </a:p>
         </p:txBody>
       </p:sp>
@@ -4724,10 +4964,30 @@
               <a:buNone/>
             </a:pPr>
             <a:r>
-              <a:rPr lang="en-US"/>
-              <a:t>https://wiki.python.org/moin/TimeComplexity</a:t>
+              <a:rPr lang="en-US" dirty="0"/>
+              <a:t>https://</a:t>
             </a:r>
-            <a:endParaRPr/>
+            <a:r>
+              <a:rPr lang="en-US" dirty="0" err="1"/>
+              <a:t>wiki.python.org</a:t>
+            </a:r>
+            <a:r>
+              <a:rPr lang="en-US" dirty="0"/>
+              <a:t>/</a:t>
+            </a:r>
+            <a:r>
+              <a:rPr lang="en-US" dirty="0" err="1"/>
+              <a:t>moin</a:t>
+            </a:r>
+            <a:r>
+              <a:rPr lang="en-US" dirty="0"/>
+              <a:t>/</a:t>
+            </a:r>
+            <a:r>
+              <a:rPr lang="en-US" dirty="0" err="1"/>
+              <a:t>TimeComplexity</a:t>
+            </a:r>
+            <a:endParaRPr dirty="0"/>
           </a:p>
         </p:txBody>
       </p:sp>
@@ -4797,203 +5057,6 @@
 </file>
 
 <file path=ppt/notesSlides/notesSlide6.xml><?xml version="1.0" encoding="utf-8"?>
-<p:notes xmlns:a="http://schemas.openxmlformats.org/drawingml/2006/main" xmlns:r="http://schemas.openxmlformats.org/officeDocument/2006/relationships" xmlns:p="http://schemas.openxmlformats.org/presentationml/2006/main" showMasterSp="0" showMasterPhAnim="0">
-  <p:cSld>
-    <p:spTree>
-      <p:nvGrpSpPr>
-        <p:cNvPr id="1" name="Shape 218">
-          <a:extLst>
-            <a:ext uri="{FF2B5EF4-FFF2-40B4-BE49-F238E27FC236}">
-              <a16:creationId xmlns:a16="http://schemas.microsoft.com/office/drawing/2014/main" id="{0CFDEDD6-CC4A-9D17-7EB0-6D6A078C0E80}"/>
-            </a:ext>
-          </a:extLst>
-        </p:cNvPr>
-        <p:cNvGrpSpPr/>
-        <p:nvPr/>
-      </p:nvGrpSpPr>
-      <p:grpSpPr>
-        <a:xfrm>
-          <a:off x="0" y="0"/>
-          <a:ext cx="0" cy="0"/>
-          <a:chOff x="0" y="0"/>
-          <a:chExt cx="0" cy="0"/>
-        </a:xfrm>
-      </p:grpSpPr>
-      <p:sp>
-        <p:nvSpPr>
-          <p:cNvPr id="219" name="Google Shape;219;g37c4946a550_0_194:notes">
-            <a:extLst>
-              <a:ext uri="{FF2B5EF4-FFF2-40B4-BE49-F238E27FC236}">
-                <a16:creationId xmlns:a16="http://schemas.microsoft.com/office/drawing/2014/main" id="{7CA4A8CB-A2BC-F024-5763-DE0F41DDFAFF}"/>
-              </a:ext>
-            </a:extLst>
-          </p:cNvPr>
-          <p:cNvSpPr>
-            <a:spLocks noGrp="1" noRot="1" noChangeAspect="1"/>
-          </p:cNvSpPr>
-          <p:nvPr>
-            <p:ph type="sldImg" idx="2"/>
-          </p:nvPr>
-        </p:nvSpPr>
-        <p:spPr>
-          <a:xfrm>
-            <a:off x="685800" y="1143000"/>
-            <a:ext cx="5486400" cy="3086100"/>
-          </a:xfrm>
-          <a:custGeom>
-            <a:avLst/>
-            <a:gdLst/>
-            <a:ahLst/>
-            <a:cxnLst/>
-            <a:rect l="l" t="t" r="r" b="b"/>
-            <a:pathLst>
-              <a:path w="120000" h="120000" extrusionOk="0">
-                <a:moveTo>
-                  <a:pt x="0" y="0"/>
-                </a:moveTo>
-                <a:lnTo>
-                  <a:pt x="120000" y="0"/>
-                </a:lnTo>
-                <a:lnTo>
-                  <a:pt x="120000" y="120000"/>
-                </a:lnTo>
-                <a:lnTo>
-                  <a:pt x="0" y="120000"/>
-                </a:lnTo>
-                <a:close/>
-              </a:path>
-            </a:pathLst>
-          </a:custGeom>
-          <a:noFill/>
-          <a:ln w="12700" cap="flat" cmpd="sng">
-            <a:solidFill>
-              <a:srgbClr val="000000"/>
-            </a:solidFill>
-            <a:prstDash val="solid"/>
-            <a:round/>
-            <a:headEnd type="none" w="sm" len="sm"/>
-            <a:tailEnd type="none" w="sm" len="sm"/>
-          </a:ln>
-        </p:spPr>
-      </p:sp>
-      <p:sp>
-        <p:nvSpPr>
-          <p:cNvPr id="220" name="Google Shape;220;g37c4946a550_0_194:notes">
-            <a:extLst>
-              <a:ext uri="{FF2B5EF4-FFF2-40B4-BE49-F238E27FC236}">
-                <a16:creationId xmlns:a16="http://schemas.microsoft.com/office/drawing/2014/main" id="{7C343540-10C4-2EC8-98AD-04C60CBBDC4A}"/>
-              </a:ext>
-            </a:extLst>
-          </p:cNvPr>
-          <p:cNvSpPr txBox="1">
-            <a:spLocks noGrp="1"/>
-          </p:cNvSpPr>
-          <p:nvPr>
-            <p:ph type="body" idx="1"/>
-          </p:nvPr>
-        </p:nvSpPr>
-        <p:spPr>
-          <a:xfrm>
-            <a:off x="685800" y="4400550"/>
-            <a:ext cx="5486400" cy="3600600"/>
-          </a:xfrm>
-          <a:prstGeom prst="rect">
-            <a:avLst/>
-          </a:prstGeom>
-          <a:noFill/>
-          <a:ln>
-            <a:noFill/>
-          </a:ln>
-        </p:spPr>
-        <p:txBody>
-          <a:bodyPr spcFirstLastPara="1" wrap="square" lIns="91425" tIns="45700" rIns="91425" bIns="45700" anchor="t" anchorCtr="0">
-            <a:noAutofit/>
-          </a:bodyPr>
-          <a:lstStyle/>
-          <a:p>
-            <a:pPr marL="0" lvl="0" indent="0" algn="l" rtl="0">
-              <a:spcBef>
-                <a:spcPts val="0"/>
-              </a:spcBef>
-              <a:spcAft>
-                <a:spcPts val="0"/>
-              </a:spcAft>
-              <a:buNone/>
-            </a:pPr>
-            <a:r>
-              <a:rPr lang="en-US"/>
-              <a:t>https://wiki.python.org/moin/TimeComplexity</a:t>
-            </a:r>
-            <a:endParaRPr/>
-          </a:p>
-        </p:txBody>
-      </p:sp>
-      <p:sp>
-        <p:nvSpPr>
-          <p:cNvPr id="221" name="Google Shape;221;g37c4946a550_0_194:notes">
-            <a:extLst>
-              <a:ext uri="{FF2B5EF4-FFF2-40B4-BE49-F238E27FC236}">
-                <a16:creationId xmlns:a16="http://schemas.microsoft.com/office/drawing/2014/main" id="{89063363-AC47-F188-40D2-EE24202C8D55}"/>
-              </a:ext>
-            </a:extLst>
-          </p:cNvPr>
-          <p:cNvSpPr txBox="1">
-            <a:spLocks noGrp="1"/>
-          </p:cNvSpPr>
-          <p:nvPr>
-            <p:ph type="sldNum" idx="12"/>
-          </p:nvPr>
-        </p:nvSpPr>
-        <p:spPr>
-          <a:xfrm>
-            <a:off x="3884613" y="8685213"/>
-            <a:ext cx="2971800" cy="458700"/>
-          </a:xfrm>
-          <a:prstGeom prst="rect">
-            <a:avLst/>
-          </a:prstGeom>
-          <a:noFill/>
-          <a:ln>
-            <a:noFill/>
-          </a:ln>
-        </p:spPr>
-        <p:txBody>
-          <a:bodyPr spcFirstLastPara="1" wrap="square" lIns="91425" tIns="45700" rIns="91425" bIns="45700" anchor="b" anchorCtr="0">
-            <a:noAutofit/>
-          </a:bodyPr>
-          <a:lstStyle/>
-          <a:p>
-            <a:pPr marL="0" lvl="0" indent="0" algn="r" rtl="0">
-              <a:spcBef>
-                <a:spcPts val="0"/>
-              </a:spcBef>
-              <a:spcAft>
-                <a:spcPts val="0"/>
-              </a:spcAft>
-              <a:buNone/>
-            </a:pPr>
-            <a:fld id="{00000000-1234-1234-1234-123412341234}" type="slidenum">
-              <a:rPr lang="en-US"/>
-              <a:t>6</a:t>
-            </a:fld>
-            <a:endParaRPr/>
-          </a:p>
-        </p:txBody>
-      </p:sp>
-    </p:spTree>
-    <p:extLst>
-      <p:ext uri="{BB962C8B-B14F-4D97-AF65-F5344CB8AC3E}">
-        <p14:creationId xmlns:p14="http://schemas.microsoft.com/office/powerpoint/2010/main" val="3996820312"/>
-      </p:ext>
-    </p:extLst>
-  </p:cSld>
-  <p:clrMapOvr>
-    <a:masterClrMapping/>
-  </p:clrMapOvr>
-</p:notes>
-</file>
-
-<file path=ppt/notesSlides/notesSlide7.xml><?xml version="1.0" encoding="utf-8"?>
 <p:notes xmlns:a="http://schemas.openxmlformats.org/drawingml/2006/main" xmlns:r="http://schemas.openxmlformats.org/officeDocument/2006/relationships" xmlns:p="http://schemas.openxmlformats.org/presentationml/2006/main" showMasterSp="0" showMasterPhAnim="0">
   <p:cSld>
     <p:spTree>
@@ -5118,10 +5181,30 @@
               <a:buNone/>
             </a:pPr>
             <a:r>
-              <a:rPr lang="en-US"/>
-              <a:t>https://wiki.python.org/moin/TimeComplexity</a:t>
+              <a:rPr lang="en-US" dirty="0"/>
+              <a:t>https://</a:t>
             </a:r>
-            <a:endParaRPr/>
+            <a:r>
+              <a:rPr lang="en-US" dirty="0" err="1"/>
+              <a:t>wiki.python.org</a:t>
+            </a:r>
+            <a:r>
+              <a:rPr lang="en-US" dirty="0"/>
+              <a:t>/</a:t>
+            </a:r>
+            <a:r>
+              <a:rPr lang="en-US" dirty="0" err="1"/>
+              <a:t>moin</a:t>
+            </a:r>
+            <a:r>
+              <a:rPr lang="en-US" dirty="0"/>
+              <a:t>/</a:t>
+            </a:r>
+            <a:r>
+              <a:rPr lang="en-US" dirty="0" err="1"/>
+              <a:t>TimeComplexity</a:t>
+            </a:r>
+            <a:endParaRPr dirty="0"/>
           </a:p>
         </p:txBody>
       </p:sp>
@@ -5171,7 +5254,7 @@
             </a:pPr>
             <a:fld id="{00000000-1234-1234-1234-123412341234}" type="slidenum">
               <a:rPr lang="en-US"/>
-              <a:t>7</a:t>
+              <a:t>6</a:t>
             </a:fld>
             <a:endParaRPr/>
           </a:p>
@@ -5190,7 +5273,7 @@
 </p:notes>
 </file>
 
-<file path=ppt/notesSlides/notesSlide8.xml><?xml version="1.0" encoding="utf-8"?>
+<file path=ppt/notesSlides/notesSlide7.xml><?xml version="1.0" encoding="utf-8"?>
 <p:notes xmlns:a="http://schemas.openxmlformats.org/drawingml/2006/main" xmlns:r="http://schemas.openxmlformats.org/officeDocument/2006/relationships" xmlns:p="http://schemas.openxmlformats.org/presentationml/2006/main" showMasterSp="0" showMasterPhAnim="0">
   <p:cSld>
     <p:spTree>
@@ -5315,10 +5398,30 @@
               <a:buNone/>
             </a:pPr>
             <a:r>
-              <a:rPr lang="en-US"/>
-              <a:t>https://wiki.python.org/moin/TimeComplexity</a:t>
+              <a:rPr lang="en-US" dirty="0"/>
+              <a:t>https://</a:t>
             </a:r>
-            <a:endParaRPr/>
+            <a:r>
+              <a:rPr lang="en-US" dirty="0" err="1"/>
+              <a:t>wiki.python.org</a:t>
+            </a:r>
+            <a:r>
+              <a:rPr lang="en-US" dirty="0"/>
+              <a:t>/</a:t>
+            </a:r>
+            <a:r>
+              <a:rPr lang="en-US" dirty="0" err="1"/>
+              <a:t>moin</a:t>
+            </a:r>
+            <a:r>
+              <a:rPr lang="en-US" dirty="0"/>
+              <a:t>/</a:t>
+            </a:r>
+            <a:r>
+              <a:rPr lang="en-US" dirty="0" err="1"/>
+              <a:t>TimeComplexity</a:t>
+            </a:r>
+            <a:endParaRPr dirty="0"/>
           </a:p>
         </p:txBody>
       </p:sp>
@@ -5368,6 +5471,223 @@
             </a:pPr>
             <a:fld id="{00000000-1234-1234-1234-123412341234}" type="slidenum">
               <a:rPr lang="en-US"/>
+              <a:t>7</a:t>
+            </a:fld>
+            <a:endParaRPr/>
+          </a:p>
+        </p:txBody>
+      </p:sp>
+    </p:spTree>
+    <p:extLst>
+      <p:ext uri="{BB962C8B-B14F-4D97-AF65-F5344CB8AC3E}">
+        <p14:creationId xmlns:p14="http://schemas.microsoft.com/office/powerpoint/2010/main" val="3944812024"/>
+      </p:ext>
+    </p:extLst>
+  </p:cSld>
+  <p:clrMapOvr>
+    <a:masterClrMapping/>
+  </p:clrMapOvr>
+</p:notes>
+</file>
+
+<file path=ppt/notesSlides/notesSlide8.xml><?xml version="1.0" encoding="utf-8"?>
+<p:notes xmlns:a="http://schemas.openxmlformats.org/drawingml/2006/main" xmlns:r="http://schemas.openxmlformats.org/officeDocument/2006/relationships" xmlns:p="http://schemas.openxmlformats.org/presentationml/2006/main" showMasterSp="0" showMasterPhAnim="0">
+  <p:cSld>
+    <p:spTree>
+      <p:nvGrpSpPr>
+        <p:cNvPr id="1" name="Shape 218">
+          <a:extLst>
+            <a:ext uri="{FF2B5EF4-FFF2-40B4-BE49-F238E27FC236}">
+              <a16:creationId xmlns:a16="http://schemas.microsoft.com/office/drawing/2014/main" id="{4065DD0B-5BBF-42BC-124E-6572272EAEF4}"/>
+            </a:ext>
+          </a:extLst>
+        </p:cNvPr>
+        <p:cNvGrpSpPr/>
+        <p:nvPr/>
+      </p:nvGrpSpPr>
+      <p:grpSpPr>
+        <a:xfrm>
+          <a:off x="0" y="0"/>
+          <a:ext cx="0" cy="0"/>
+          <a:chOff x="0" y="0"/>
+          <a:chExt cx="0" cy="0"/>
+        </a:xfrm>
+      </p:grpSpPr>
+      <p:sp>
+        <p:nvSpPr>
+          <p:cNvPr id="219" name="Google Shape;219;g37c4946a550_0_194:notes">
+            <a:extLst>
+              <a:ext uri="{FF2B5EF4-FFF2-40B4-BE49-F238E27FC236}">
+                <a16:creationId xmlns:a16="http://schemas.microsoft.com/office/drawing/2014/main" id="{F1B6F0CA-3227-FAF4-5276-2F0D6C36B62F}"/>
+              </a:ext>
+            </a:extLst>
+          </p:cNvPr>
+          <p:cNvSpPr>
+            <a:spLocks noGrp="1" noRot="1" noChangeAspect="1"/>
+          </p:cNvSpPr>
+          <p:nvPr>
+            <p:ph type="sldImg" idx="2"/>
+          </p:nvPr>
+        </p:nvSpPr>
+        <p:spPr>
+          <a:xfrm>
+            <a:off x="685800" y="1143000"/>
+            <a:ext cx="5486400" cy="3086100"/>
+          </a:xfrm>
+          <a:custGeom>
+            <a:avLst/>
+            <a:gdLst/>
+            <a:ahLst/>
+            <a:cxnLst/>
+            <a:rect l="l" t="t" r="r" b="b"/>
+            <a:pathLst>
+              <a:path w="120000" h="120000" extrusionOk="0">
+                <a:moveTo>
+                  <a:pt x="0" y="0"/>
+                </a:moveTo>
+                <a:lnTo>
+                  <a:pt x="120000" y="0"/>
+                </a:lnTo>
+                <a:lnTo>
+                  <a:pt x="120000" y="120000"/>
+                </a:lnTo>
+                <a:lnTo>
+                  <a:pt x="0" y="120000"/>
+                </a:lnTo>
+                <a:close/>
+              </a:path>
+            </a:pathLst>
+          </a:custGeom>
+          <a:noFill/>
+          <a:ln w="12700" cap="flat" cmpd="sng">
+            <a:solidFill>
+              <a:srgbClr val="000000"/>
+            </a:solidFill>
+            <a:prstDash val="solid"/>
+            <a:round/>
+            <a:headEnd type="none" w="sm" len="sm"/>
+            <a:tailEnd type="none" w="sm" len="sm"/>
+          </a:ln>
+        </p:spPr>
+      </p:sp>
+      <p:sp>
+        <p:nvSpPr>
+          <p:cNvPr id="220" name="Google Shape;220;g37c4946a550_0_194:notes">
+            <a:extLst>
+              <a:ext uri="{FF2B5EF4-FFF2-40B4-BE49-F238E27FC236}">
+                <a16:creationId xmlns:a16="http://schemas.microsoft.com/office/drawing/2014/main" id="{48C73575-9C94-92E4-1F62-AB9F756513DE}"/>
+              </a:ext>
+            </a:extLst>
+          </p:cNvPr>
+          <p:cNvSpPr txBox="1">
+            <a:spLocks noGrp="1"/>
+          </p:cNvSpPr>
+          <p:nvPr>
+            <p:ph type="body" idx="1"/>
+          </p:nvPr>
+        </p:nvSpPr>
+        <p:spPr>
+          <a:xfrm>
+            <a:off x="685800" y="4400550"/>
+            <a:ext cx="5486400" cy="3600600"/>
+          </a:xfrm>
+          <a:prstGeom prst="rect">
+            <a:avLst/>
+          </a:prstGeom>
+          <a:noFill/>
+          <a:ln>
+            <a:noFill/>
+          </a:ln>
+        </p:spPr>
+        <p:txBody>
+          <a:bodyPr spcFirstLastPara="1" wrap="square" lIns="91425" tIns="45700" rIns="91425" bIns="45700" anchor="t" anchorCtr="0">
+            <a:noAutofit/>
+          </a:bodyPr>
+          <a:lstStyle/>
+          <a:p>
+            <a:pPr marL="0" lvl="0" indent="0" algn="l" rtl="0">
+              <a:spcBef>
+                <a:spcPts val="0"/>
+              </a:spcBef>
+              <a:spcAft>
+                <a:spcPts val="0"/>
+              </a:spcAft>
+              <a:buNone/>
+            </a:pPr>
+            <a:r>
+              <a:rPr lang="en-US" dirty="0"/>
+              <a:t>https://</a:t>
+            </a:r>
+            <a:r>
+              <a:rPr lang="en-US" dirty="0" err="1"/>
+              <a:t>wiki.python.org</a:t>
+            </a:r>
+            <a:r>
+              <a:rPr lang="en-US" dirty="0"/>
+              <a:t>/</a:t>
+            </a:r>
+            <a:r>
+              <a:rPr lang="en-US" dirty="0" err="1"/>
+              <a:t>moin</a:t>
+            </a:r>
+            <a:r>
+              <a:rPr lang="en-US" dirty="0"/>
+              <a:t>/</a:t>
+            </a:r>
+            <a:r>
+              <a:rPr lang="en-US" dirty="0" err="1"/>
+              <a:t>TimeComplexity</a:t>
+            </a:r>
+            <a:endParaRPr dirty="0"/>
+          </a:p>
+        </p:txBody>
+      </p:sp>
+      <p:sp>
+        <p:nvSpPr>
+          <p:cNvPr id="221" name="Google Shape;221;g37c4946a550_0_194:notes">
+            <a:extLst>
+              <a:ext uri="{FF2B5EF4-FFF2-40B4-BE49-F238E27FC236}">
+                <a16:creationId xmlns:a16="http://schemas.microsoft.com/office/drawing/2014/main" id="{C25AC9B1-2EF2-29CB-11D2-AD62DC558E23}"/>
+              </a:ext>
+            </a:extLst>
+          </p:cNvPr>
+          <p:cNvSpPr txBox="1">
+            <a:spLocks noGrp="1"/>
+          </p:cNvSpPr>
+          <p:nvPr>
+            <p:ph type="sldNum" idx="12"/>
+          </p:nvPr>
+        </p:nvSpPr>
+        <p:spPr>
+          <a:xfrm>
+            <a:off x="3884613" y="8685213"/>
+            <a:ext cx="2971800" cy="458700"/>
+          </a:xfrm>
+          <a:prstGeom prst="rect">
+            <a:avLst/>
+          </a:prstGeom>
+          <a:noFill/>
+          <a:ln>
+            <a:noFill/>
+          </a:ln>
+        </p:spPr>
+        <p:txBody>
+          <a:bodyPr spcFirstLastPara="1" wrap="square" lIns="91425" tIns="45700" rIns="91425" bIns="45700" anchor="b" anchorCtr="0">
+            <a:noAutofit/>
+          </a:bodyPr>
+          <a:lstStyle/>
+          <a:p>
+            <a:pPr marL="0" lvl="0" indent="0" algn="r" rtl="0">
+              <a:spcBef>
+                <a:spcPts val="0"/>
+              </a:spcBef>
+              <a:spcAft>
+                <a:spcPts val="0"/>
+              </a:spcAft>
+              <a:buNone/>
+            </a:pPr>
+            <a:fld id="{00000000-1234-1234-1234-123412341234}" type="slidenum">
+              <a:rPr lang="en-US"/>
               <a:t>8</a:t>
             </a:fld>
             <a:endParaRPr/>
@@ -5377,7 +5697,7 @@
     </p:spTree>
     <p:extLst>
       <p:ext uri="{BB962C8B-B14F-4D97-AF65-F5344CB8AC3E}">
-        <p14:creationId xmlns:p14="http://schemas.microsoft.com/office/powerpoint/2010/main" val="3944812024"/>
+        <p14:creationId xmlns:p14="http://schemas.microsoft.com/office/powerpoint/2010/main" val="1833808465"/>
       </p:ext>
     </p:extLst>
   </p:cSld>
@@ -5498,10 +5818,30 @@
               <a:buNone/>
             </a:pPr>
             <a:r>
-              <a:rPr lang="en-US"/>
-              <a:t>https://wiki.python.org/moin/TimeComplexity</a:t>
+              <a:rPr lang="en-US" dirty="0"/>
+              <a:t>https://</a:t>
             </a:r>
-            <a:endParaRPr/>
+            <a:r>
+              <a:rPr lang="en-US" dirty="0" err="1"/>
+              <a:t>wiki.python.org</a:t>
+            </a:r>
+            <a:r>
+              <a:rPr lang="en-US" dirty="0"/>
+              <a:t>/</a:t>
+            </a:r>
+            <a:r>
+              <a:rPr lang="en-US" dirty="0" err="1"/>
+              <a:t>moin</a:t>
+            </a:r>
+            <a:r>
+              <a:rPr lang="en-US" dirty="0"/>
+              <a:t>/</a:t>
+            </a:r>
+            <a:r>
+              <a:rPr lang="en-US" dirty="0" err="1"/>
+              <a:t>TimeComplexity</a:t>
+            </a:r>
+            <a:endParaRPr dirty="0"/>
           </a:p>
         </p:txBody>
       </p:sp>
@@ -31989,7 +32329,7 @@
         <p:spPr>
           <a:xfrm>
             <a:off x="6074643" y="2874195"/>
-            <a:ext cx="6117357" cy="923289"/>
+            <a:ext cx="6117357" cy="1200288"/>
           </a:xfrm>
           <a:prstGeom prst="rect">
             <a:avLst/>
@@ -32068,6 +32408,40 @@
                 <a:sym typeface="Gill Sans"/>
               </a:rPr>
               <a:t>3.3.2 Ternary Search</a:t>
+            </a:r>
+          </a:p>
+          <a:p>
+            <a:pPr marL="285750" indent="-285750">
+              <a:buClr>
+                <a:schemeClr val="lt1"/>
+              </a:buClr>
+              <a:buSzPts val="1800"/>
+              <a:buFont typeface="Arial"/>
+              <a:buChar char="•"/>
+            </a:pPr>
+            <a:r>
+              <a:rPr lang="en-US" sz="1800" dirty="0" err="1">
+                <a:solidFill>
+                  <a:schemeClr val="lt1"/>
+                </a:solidFill>
+                <a:latin typeface="Gill Sans"/>
+                <a:ea typeface="Gill Sans"/>
+                <a:cs typeface="Gill Sans"/>
+                <a:sym typeface="Gill Sans"/>
+              </a:rPr>
+              <a:t>foolingaround</a:t>
+            </a:r>
+            <a:r>
+              <a:rPr lang="en-US" sz="1800" dirty="0">
+                <a:solidFill>
+                  <a:schemeClr val="lt1"/>
+                </a:solidFill>
+                <a:latin typeface="Gill Sans"/>
+                <a:ea typeface="Gill Sans"/>
+                <a:cs typeface="Gill Sans"/>
+                <a:sym typeface="Gill Sans"/>
+              </a:rPr>
+              <a:t>, Kattis Problem </a:t>
             </a:r>
           </a:p>
         </p:txBody>
@@ -36230,351 +36604,8 @@
         </p:nvSpPr>
         <p:spPr>
           <a:xfrm>
-            <a:off x="494675" y="1170125"/>
-            <a:ext cx="11231400" cy="4639200"/>
-          </a:xfrm>
-          <a:prstGeom prst="rect">
-            <a:avLst/>
-          </a:prstGeom>
-          <a:noFill/>
-          <a:ln>
-            <a:noFill/>
-          </a:ln>
-        </p:spPr>
-        <p:txBody>
-          <a:bodyPr spcFirstLastPara="1" wrap="square" lIns="91425" tIns="45700" rIns="91425" bIns="45700" anchor="t" anchorCtr="0">
-            <a:normAutofit fontScale="92500" lnSpcReduction="20000"/>
-          </a:bodyPr>
-          <a:lstStyle/>
-          <a:p>
-            <a:pPr marL="457200" lvl="0" indent="-355600" algn="l" rtl="0">
-              <a:spcBef>
-                <a:spcPts val="0"/>
-              </a:spcBef>
-              <a:spcAft>
-                <a:spcPts val="0"/>
-              </a:spcAft>
-              <a:buSzPts val="2000"/>
-              <a:buChar char="•"/>
-            </a:pPr>
-            <a:r>
-              <a:rPr lang="en-US" sz="2000"/>
-              <a:t>Some problems disguise input constraints to look too big for Complete Search.</a:t>
-            </a:r>
-            <a:endParaRPr sz="2000"/>
-          </a:p>
-          <a:p>
-            <a:pPr marL="457200" lvl="0" indent="-355600" algn="l" rtl="0">
-              <a:spcBef>
-                <a:spcPts val="0"/>
-              </a:spcBef>
-              <a:spcAft>
-                <a:spcPts val="0"/>
-              </a:spcAft>
-              <a:buSzPts val="2000"/>
-              <a:buChar char="•"/>
-            </a:pPr>
-            <a:r>
-              <a:rPr lang="en-US" sz="2000"/>
-              <a:t>Careful reading can reveal remarks that shrink the search space.</a:t>
-            </a:r>
-            <a:endParaRPr sz="2000"/>
-          </a:p>
-          <a:p>
-            <a:pPr marL="457200" lvl="0" indent="-355600" algn="l" rtl="0">
-              <a:spcBef>
-                <a:spcPts val="0"/>
-              </a:spcBef>
-              <a:spcAft>
-                <a:spcPts val="0"/>
-              </a:spcAft>
-              <a:buSzPts val="2000"/>
-              <a:buChar char="•"/>
-            </a:pPr>
-            <a:r>
-              <a:rPr lang="en-US" sz="2000"/>
-              <a:t>Ex:</a:t>
-            </a:r>
-            <a:endParaRPr sz="2000"/>
-          </a:p>
-          <a:p>
-            <a:pPr marL="914400" lvl="1" indent="-355600" algn="l" rtl="0">
-              <a:lnSpc>
-                <a:spcPct val="115000"/>
-              </a:lnSpc>
-              <a:spcBef>
-                <a:spcPts val="0"/>
-              </a:spcBef>
-              <a:spcAft>
-                <a:spcPts val="0"/>
-              </a:spcAft>
-              <a:buSzPts val="2000"/>
-              <a:buChar char="•"/>
-            </a:pPr>
-            <a:r>
-              <a:rPr lang="en-US" sz="2000"/>
-              <a:t>Given a multiset S of M = 100K integers, we want to know how many different integers that we can form if we pick two (not necessarily distinct) integers from S and sum them. </a:t>
-            </a:r>
-            <a:endParaRPr sz="2000"/>
-          </a:p>
-          <a:p>
-            <a:pPr marL="914400" lvl="1" indent="-355600" algn="l" rtl="0">
-              <a:lnSpc>
-                <a:spcPct val="115000"/>
-              </a:lnSpc>
-              <a:spcBef>
-                <a:spcPts val="0"/>
-              </a:spcBef>
-              <a:spcAft>
-                <a:spcPts val="0"/>
-              </a:spcAft>
-              <a:buSzPts val="2000"/>
-              <a:buChar char="•"/>
-            </a:pPr>
-            <a:r>
-              <a:rPr lang="en-US" sz="2000"/>
-              <a:t>The content of multiset S is prime numbers not more than 20K. </a:t>
-            </a:r>
-            <a:endParaRPr sz="2000"/>
-          </a:p>
-          <a:p>
-            <a:pPr marL="457200" lvl="0" indent="-355600" algn="l" rtl="0">
-              <a:lnSpc>
-                <a:spcPct val="115000"/>
-              </a:lnSpc>
-              <a:spcBef>
-                <a:spcPts val="0"/>
-              </a:spcBef>
-              <a:spcAft>
-                <a:spcPts val="0"/>
-              </a:spcAft>
-              <a:buSzPts val="2000"/>
-              <a:buChar char="•"/>
-            </a:pPr>
-            <a:r>
-              <a:rPr lang="en-US" sz="2000"/>
-              <a:t>Direct Method:</a:t>
-            </a:r>
-            <a:endParaRPr sz="2000"/>
-          </a:p>
-          <a:p>
-            <a:pPr marL="914400" lvl="1" indent="-355600" algn="l" rtl="0">
-              <a:lnSpc>
-                <a:spcPct val="115000"/>
-              </a:lnSpc>
-              <a:spcBef>
-                <a:spcPts val="0"/>
-              </a:spcBef>
-              <a:spcAft>
-                <a:spcPts val="0"/>
-              </a:spcAft>
-              <a:buSzPts val="2000"/>
-              <a:buChar char="•"/>
-            </a:pPr>
-            <a:r>
-              <a:rPr lang="en-US" sz="2000"/>
-              <a:t>Try all possible O(M</a:t>
-            </a:r>
-            <a:r>
-              <a:rPr lang="en-US" sz="2000" baseline="30000"/>
-              <a:t>2</a:t>
-            </a:r>
-            <a:r>
-              <a:rPr lang="en-US" sz="2000"/>
-              <a:t>) pairs of integers and insert their sums into a hash table (O(1) per insertion)</a:t>
-            </a:r>
-            <a:endParaRPr sz="2000"/>
-          </a:p>
-          <a:p>
-            <a:pPr marL="914400" lvl="1" indent="-355600" algn="l" rtl="0">
-              <a:lnSpc>
-                <a:spcPct val="115000"/>
-              </a:lnSpc>
-              <a:spcBef>
-                <a:spcPts val="0"/>
-              </a:spcBef>
-              <a:spcAft>
-                <a:spcPts val="0"/>
-              </a:spcAft>
-              <a:buSzPts val="2000"/>
-              <a:buChar char="•"/>
-            </a:pPr>
-            <a:r>
-              <a:rPr lang="en-US" sz="2000"/>
-              <a:t>Get TLE as M = 100K integers (100’000</a:t>
-            </a:r>
-            <a:r>
-              <a:rPr lang="en-US" sz="2000" baseline="30000"/>
-              <a:t>2</a:t>
-            </a:r>
-            <a:r>
-              <a:rPr lang="en-US" sz="2000"/>
-              <a:t> = 1 Trillion operations)</a:t>
-            </a:r>
-            <a:endParaRPr sz="2000"/>
-          </a:p>
-          <a:p>
-            <a:pPr marL="457200" lvl="0" indent="-355600" algn="l" rtl="0">
-              <a:spcBef>
-                <a:spcPts val="0"/>
-              </a:spcBef>
-              <a:spcAft>
-                <a:spcPts val="0"/>
-              </a:spcAft>
-              <a:buSzPts val="2000"/>
-              <a:buChar char="•"/>
-            </a:pPr>
-            <a:r>
-              <a:rPr lang="en-US" sz="2000"/>
-              <a:t>Key Observation:</a:t>
-            </a:r>
-            <a:endParaRPr sz="2000"/>
-          </a:p>
-          <a:p>
-            <a:pPr marL="914400" lvl="1" indent="-355600" algn="l" rtl="0">
-              <a:lnSpc>
-                <a:spcPct val="115000"/>
-              </a:lnSpc>
-              <a:spcBef>
-                <a:spcPts val="0"/>
-              </a:spcBef>
-              <a:spcAft>
-                <a:spcPts val="0"/>
-              </a:spcAft>
-              <a:buSzPts val="2000"/>
-              <a:buChar char="•"/>
-            </a:pPr>
-            <a:r>
-              <a:rPr lang="en-US" sz="2000"/>
-              <a:t>S contains only prime numbers under 20K.</a:t>
-            </a:r>
-            <a:endParaRPr sz="2000"/>
-          </a:p>
-          <a:p>
-            <a:pPr marL="914400" lvl="1" indent="-355600" algn="l" rtl="0">
-              <a:lnSpc>
-                <a:spcPct val="115000"/>
-              </a:lnSpc>
-              <a:spcBef>
-                <a:spcPts val="0"/>
-              </a:spcBef>
-              <a:spcAft>
-                <a:spcPts val="0"/>
-              </a:spcAft>
-              <a:buSzPts val="2000"/>
-              <a:buChar char="•"/>
-            </a:pPr>
-            <a:r>
-              <a:rPr lang="en-US" sz="2000"/>
-              <a:t>In Book 2 of the textbook we find that π (20’000) = 2262 (prime counting function)</a:t>
-            </a:r>
-            <a:endParaRPr sz="2000"/>
-          </a:p>
-          <a:p>
-            <a:pPr marL="457200" lvl="0" indent="-355600" algn="l" rtl="0">
-              <a:spcBef>
-                <a:spcPts val="0"/>
-              </a:spcBef>
-              <a:spcAft>
-                <a:spcPts val="0"/>
-              </a:spcAft>
-              <a:buSzPts val="2000"/>
-              <a:buChar char="•"/>
-            </a:pPr>
-            <a:r>
-              <a:rPr lang="en-US" sz="2000"/>
-              <a:t>Optimized Approach</a:t>
-            </a:r>
-            <a:endParaRPr sz="2000"/>
-          </a:p>
-          <a:p>
-            <a:pPr marL="914400" lvl="1" indent="-355600" algn="l" rtl="0">
-              <a:spcBef>
-                <a:spcPts val="0"/>
-              </a:spcBef>
-              <a:spcAft>
-                <a:spcPts val="0"/>
-              </a:spcAft>
-              <a:buSzPts val="2000"/>
-              <a:buChar char="•"/>
-            </a:pPr>
-            <a:r>
-              <a:rPr lang="en-US" sz="2000"/>
-              <a:t>There are only 2262 distinct prime numbers under 20K.</a:t>
-            </a:r>
-            <a:endParaRPr sz="2000"/>
-          </a:p>
-          <a:p>
-            <a:pPr marL="914400" lvl="1" indent="-355600" algn="l" rtl="0">
-              <a:spcBef>
-                <a:spcPts val="0"/>
-              </a:spcBef>
-              <a:spcAft>
-                <a:spcPts val="0"/>
-              </a:spcAft>
-              <a:buSzPts val="2000"/>
-              <a:buChar char="•"/>
-            </a:pPr>
-            <a:r>
-              <a:rPr lang="en-US" sz="2000"/>
-              <a:t>Do one O(M) data compression pass to ensure that each integer only has at most 2 copies</a:t>
-            </a:r>
-            <a:endParaRPr sz="2000"/>
-          </a:p>
-          <a:p>
-            <a:pPr marL="1371600" lvl="2" indent="-355600" algn="l" rtl="0">
-              <a:spcBef>
-                <a:spcPts val="0"/>
-              </a:spcBef>
-              <a:spcAft>
-                <a:spcPts val="0"/>
-              </a:spcAft>
-              <a:buSzPts val="2000"/>
-              <a:buChar char="•"/>
-            </a:pPr>
-            <a:r>
-              <a:rPr lang="en-US" sz="2000"/>
-              <a:t>i.e. N ≤  2x2262</a:t>
-            </a:r>
-            <a:endParaRPr sz="2000"/>
-          </a:p>
-          <a:p>
-            <a:pPr marL="914400" lvl="1" indent="-355600" algn="l" rtl="0">
-              <a:spcBef>
-                <a:spcPts val="0"/>
-              </a:spcBef>
-              <a:spcAft>
-                <a:spcPts val="0"/>
-              </a:spcAft>
-              <a:buSzPts val="2000"/>
-              <a:buChar char="•"/>
-            </a:pPr>
-            <a:r>
-              <a:rPr lang="en-US" sz="2000"/>
-              <a:t>Do O(N</a:t>
-            </a:r>
-            <a:r>
-              <a:rPr lang="en-US" sz="2000" baseline="30000"/>
-              <a:t>2</a:t>
-            </a:r>
-            <a:r>
-              <a:rPr lang="en-US" sz="2000"/>
-              <a:t>) complete search as before but now is ~ 20.5M operations</a:t>
-            </a:r>
-            <a:endParaRPr sz="2000"/>
-          </a:p>
-        </p:txBody>
-      </p:sp>
-      <p:sp>
-        <p:nvSpPr>
-          <p:cNvPr id="417" name="Google Shape;417;g38a82980c7b_2_225"/>
-          <p:cNvSpPr txBox="1"/>
-          <p:nvPr/>
-        </p:nvSpPr>
-        <p:spPr>
-          <a:xfrm>
-            <a:off x="480300" y="5809275"/>
-            <a:ext cx="11231400" cy="989700"/>
+            <a:off x="494675" y="1170124"/>
+            <a:ext cx="11231400" cy="5459451"/>
           </a:xfrm>
           <a:prstGeom prst="rect">
             <a:avLst/>
@@ -36590,185 +36621,321 @@
           </a:bodyPr>
           <a:lstStyle/>
           <a:p>
-            <a:pPr marL="457200" marR="0" lvl="0" indent="-355600" algn="l" defTabSz="914400" rtl="0" eaLnBrk="1" fontAlgn="auto" latinLnBrk="0" hangingPunct="1">
-              <a:lnSpc>
-                <a:spcPct val="100000"/>
-              </a:lnSpc>
-              <a:spcBef>
-                <a:spcPts val="0"/>
-              </a:spcBef>
-              <a:spcAft>
-                <a:spcPts val="0"/>
-              </a:spcAft>
-              <a:buClr>
-                <a:srgbClr val="9BAFB5"/>
-              </a:buClr>
+            <a:pPr marL="457200" lvl="0" indent="-355600" algn="l" rtl="0">
+              <a:spcBef>
+                <a:spcPts val="0"/>
+              </a:spcBef>
+              <a:spcAft>
+                <a:spcPts val="0"/>
+              </a:spcAft>
               <a:buSzPts val="2000"/>
-              <a:buFont typeface="Arial"/>
               <a:buChar char="•"/>
-              <a:tabLst/>
-              <a:defRPr/>
             </a:pPr>
             <a:r>
-              <a:rPr kumimoji="0" lang="en-US" sz="2000" b="0" i="0" u="none" strike="noStrike" kern="0" cap="none" spc="0" normalizeH="0" baseline="0" noProof="0">
-                <a:ln>
-                  <a:noFill/>
-                </a:ln>
-                <a:solidFill>
-                  <a:srgbClr val="262626"/>
-                </a:solidFill>
-                <a:effectLst/>
-                <a:uLnTx/>
-                <a:uFillTx/>
-                <a:latin typeface="Gill Sans"/>
-                <a:ea typeface="Gill Sans"/>
-                <a:cs typeface="Gill Sans"/>
-                <a:sym typeface="Gill Sans"/>
-              </a:rPr>
-              <a:t>Sources:</a:t>
+              <a:rPr lang="en-US" sz="2000" dirty="0"/>
+              <a:t>Some problems disguise input constraints to look too big for Complete Search.</a:t>
             </a:r>
-            <a:endParaRPr kumimoji="0" sz="2000" b="0" i="0" u="none" strike="noStrike" kern="0" cap="none" spc="0" normalizeH="0" baseline="0" noProof="0">
-              <a:ln>
-                <a:noFill/>
-              </a:ln>
-              <a:solidFill>
-                <a:srgbClr val="262626"/>
-              </a:solidFill>
-              <a:effectLst/>
-              <a:uLnTx/>
-              <a:uFillTx/>
-              <a:latin typeface="Gill Sans"/>
-              <a:ea typeface="Gill Sans"/>
-              <a:cs typeface="Gill Sans"/>
-              <a:sym typeface="Gill Sans"/>
-            </a:endParaRPr>
+            <a:endParaRPr sz="2000" dirty="0"/>
           </a:p>
           <a:p>
-            <a:pPr marL="914400" marR="0" lvl="1" indent="-355600" algn="l" defTabSz="914400" rtl="0" eaLnBrk="1" fontAlgn="auto" latinLnBrk="0" hangingPunct="1">
-              <a:lnSpc>
-                <a:spcPct val="100000"/>
-              </a:lnSpc>
-              <a:spcBef>
-                <a:spcPts val="0"/>
-              </a:spcBef>
-              <a:spcAft>
-                <a:spcPts val="0"/>
-              </a:spcAft>
-              <a:buClr>
-                <a:srgbClr val="262626"/>
-              </a:buClr>
+            <a:pPr marL="457200" lvl="0" indent="-355600" algn="l" rtl="0">
+              <a:spcBef>
+                <a:spcPts val="0"/>
+              </a:spcBef>
+              <a:spcAft>
+                <a:spcPts val="0"/>
+              </a:spcAft>
               <a:buSzPts val="2000"/>
-              <a:buFont typeface="Gill Sans"/>
               <a:buChar char="•"/>
-              <a:tabLst/>
-              <a:defRPr/>
             </a:pPr>
             <a:r>
-              <a:rPr kumimoji="0" lang="en-US" sz="2000" b="0" i="0" u="none" strike="noStrike" kern="0" cap="none" spc="0" normalizeH="0" baseline="0" noProof="0">
-                <a:ln>
-                  <a:noFill/>
-                </a:ln>
-                <a:solidFill>
-                  <a:srgbClr val="262626"/>
-                </a:solidFill>
-                <a:effectLst/>
-                <a:uLnTx/>
-                <a:uFillTx/>
-                <a:latin typeface="Gill Sans"/>
-                <a:ea typeface="Gill Sans"/>
-                <a:cs typeface="Gill Sans"/>
-                <a:sym typeface="Gill Sans"/>
-              </a:rPr>
-              <a:t>Competitive Programming 4 Section 3.2.3</a:t>
+              <a:rPr lang="en-US" sz="2000" dirty="0"/>
+              <a:t>Careful reading can reveal remarks that shrink the search space.</a:t>
             </a:r>
-            <a:endParaRPr kumimoji="0" sz="2000" b="0" i="0" u="none" strike="noStrike" kern="0" cap="none" spc="0" normalizeH="0" baseline="0" noProof="0">
-              <a:ln>
-                <a:noFill/>
-              </a:ln>
-              <a:solidFill>
-                <a:srgbClr val="262626"/>
-              </a:solidFill>
-              <a:effectLst/>
-              <a:uLnTx/>
-              <a:uFillTx/>
-              <a:latin typeface="Gill Sans"/>
-              <a:ea typeface="Gill Sans"/>
-              <a:cs typeface="Gill Sans"/>
-              <a:sym typeface="Gill Sans"/>
-            </a:endParaRPr>
+            <a:endParaRPr sz="2000" dirty="0"/>
           </a:p>
           <a:p>
-            <a:pPr marL="914400" marR="0" lvl="1" indent="-355600" algn="l" defTabSz="914400" rtl="0" eaLnBrk="1" fontAlgn="auto" latinLnBrk="0" hangingPunct="1">
-              <a:lnSpc>
-                <a:spcPct val="100000"/>
-              </a:lnSpc>
-              <a:spcBef>
-                <a:spcPts val="0"/>
-              </a:spcBef>
-              <a:spcAft>
-                <a:spcPts val="0"/>
-              </a:spcAft>
-              <a:buClr>
-                <a:srgbClr val="262626"/>
-              </a:buClr>
+            <a:pPr marL="457200" lvl="0" indent="-355600" algn="l" rtl="0">
+              <a:spcBef>
+                <a:spcPts val="0"/>
+              </a:spcBef>
+              <a:spcAft>
+                <a:spcPts val="0"/>
+              </a:spcAft>
               <a:buSzPts val="2000"/>
-              <a:buFont typeface="Gill Sans"/>
               <a:buChar char="•"/>
-              <a:tabLst/>
-              <a:defRPr/>
             </a:pPr>
             <a:r>
-              <a:rPr kumimoji="0" lang="en-US" sz="2000" b="0" i="0" u="sng" strike="noStrike" kern="0" cap="none" spc="0" normalizeH="0" baseline="0" noProof="0">
-                <a:ln>
-                  <a:noFill/>
-                </a:ln>
-                <a:solidFill>
-                  <a:srgbClr val="00B0F0"/>
-                </a:solidFill>
-                <a:effectLst/>
-                <a:uLnTx/>
-                <a:uFillTx/>
-                <a:latin typeface="Gill Sans"/>
-                <a:ea typeface="Gill Sans"/>
-                <a:cs typeface="Gill Sans"/>
-                <a:sym typeface="Gill Sans"/>
-                <a:hlinkClick r:id="rId3"/>
-              </a:rPr>
-              <a:t>https://en.wikipedia.org/wiki/Prime-counting_function</a:t>
+              <a:rPr lang="en-US" sz="2000" dirty="0"/>
+              <a:t>Ex:</a:t>
+            </a:r>
+            <a:endParaRPr sz="2000" dirty="0"/>
+          </a:p>
+          <a:p>
+            <a:pPr marL="914400" lvl="1" indent="-355600" algn="l" rtl="0">
+              <a:lnSpc>
+                <a:spcPct val="115000"/>
+              </a:lnSpc>
+              <a:spcBef>
+                <a:spcPts val="0"/>
+              </a:spcBef>
+              <a:spcAft>
+                <a:spcPts val="0"/>
+              </a:spcAft>
+              <a:buSzPts val="2000"/>
+              <a:buChar char="•"/>
+            </a:pPr>
+            <a:r>
+              <a:rPr lang="en-US" sz="2000" dirty="0"/>
+              <a:t>Given a multiset S of M = 100K integers, we want to know how many different integers that we can form if we pick two (not necessarily distinct) integers from S and sum them. </a:t>
+            </a:r>
+            <a:endParaRPr sz="2000" dirty="0"/>
+          </a:p>
+          <a:p>
+            <a:pPr marL="914400" lvl="1" indent="-355600" algn="l" rtl="0">
+              <a:lnSpc>
+                <a:spcPct val="115000"/>
+              </a:lnSpc>
+              <a:spcBef>
+                <a:spcPts val="0"/>
+              </a:spcBef>
+              <a:spcAft>
+                <a:spcPts val="0"/>
+              </a:spcAft>
+              <a:buSzPts val="2000"/>
+              <a:buChar char="•"/>
+            </a:pPr>
+            <a:r>
+              <a:rPr lang="en-US" sz="2000" dirty="0"/>
+              <a:t>The content of multiset S is prime numbers not more than 20K. </a:t>
+            </a:r>
+            <a:endParaRPr sz="2000" dirty="0"/>
+          </a:p>
+          <a:p>
+            <a:pPr marL="457200" lvl="0" indent="-355600" algn="l" rtl="0">
+              <a:lnSpc>
+                <a:spcPct val="115000"/>
+              </a:lnSpc>
+              <a:spcBef>
+                <a:spcPts val="0"/>
+              </a:spcBef>
+              <a:spcAft>
+                <a:spcPts val="0"/>
+              </a:spcAft>
+              <a:buSzPts val="2000"/>
+              <a:buChar char="•"/>
+            </a:pPr>
+            <a:r>
+              <a:rPr lang="en-US" sz="2000" dirty="0"/>
+              <a:t>Direct Method:</a:t>
+            </a:r>
+            <a:endParaRPr sz="2000" dirty="0"/>
+          </a:p>
+          <a:p>
+            <a:pPr marL="914400" lvl="1" indent="-355600" algn="l" rtl="0">
+              <a:lnSpc>
+                <a:spcPct val="115000"/>
+              </a:lnSpc>
+              <a:spcBef>
+                <a:spcPts val="0"/>
+              </a:spcBef>
+              <a:spcAft>
+                <a:spcPts val="0"/>
+              </a:spcAft>
+              <a:buSzPts val="2000"/>
+              <a:buChar char="•"/>
+            </a:pPr>
+            <a:r>
+              <a:rPr lang="en-US" sz="2000" dirty="0"/>
+              <a:t>Try all possible O(M</a:t>
             </a:r>
             <a:r>
-              <a:rPr kumimoji="0" lang="en-US" sz="2000" b="0" i="0" u="none" strike="noStrike" kern="0" cap="none" spc="0" normalizeH="0" baseline="0" noProof="0">
-                <a:ln>
-                  <a:noFill/>
-                </a:ln>
-                <a:solidFill>
-                  <a:srgbClr val="262626"/>
-                </a:solidFill>
-                <a:effectLst/>
-                <a:uLnTx/>
-                <a:uFillTx/>
-                <a:latin typeface="Gill Sans"/>
-                <a:ea typeface="Gill Sans"/>
-                <a:cs typeface="Gill Sans"/>
-                <a:sym typeface="Gill Sans"/>
-              </a:rPr>
-              <a:t> </a:t>
+              <a:rPr lang="en-US" sz="2000" baseline="30000" dirty="0"/>
+              <a:t>2</a:t>
             </a:r>
-            <a:endParaRPr kumimoji="0" sz="2000" b="0" i="0" u="none" strike="noStrike" kern="0" cap="none" spc="0" normalizeH="0" baseline="0" noProof="0">
-              <a:ln>
-                <a:noFill/>
-              </a:ln>
-              <a:solidFill>
-                <a:srgbClr val="262626"/>
-              </a:solidFill>
-              <a:effectLst/>
-              <a:uLnTx/>
-              <a:uFillTx/>
-              <a:latin typeface="Gill Sans"/>
-              <a:ea typeface="Gill Sans"/>
-              <a:cs typeface="Gill Sans"/>
-              <a:sym typeface="Gill Sans"/>
-            </a:endParaRPr>
+            <a:r>
+              <a:rPr lang="en-US" sz="2000" dirty="0"/>
+              <a:t>) pairs of integers and insert their sums into a hash table (O(1) per insertion)</a:t>
+            </a:r>
+            <a:endParaRPr sz="2000" dirty="0"/>
+          </a:p>
+          <a:p>
+            <a:pPr marL="914400" lvl="1" indent="-355600" algn="l" rtl="0">
+              <a:lnSpc>
+                <a:spcPct val="115000"/>
+              </a:lnSpc>
+              <a:spcBef>
+                <a:spcPts val="0"/>
+              </a:spcBef>
+              <a:spcAft>
+                <a:spcPts val="0"/>
+              </a:spcAft>
+              <a:buSzPts val="2000"/>
+              <a:buChar char="•"/>
+            </a:pPr>
+            <a:r>
+              <a:rPr lang="en-US" sz="2000" dirty="0"/>
+              <a:t>Get TLE as M = 100K integers (100’000</a:t>
+            </a:r>
+            <a:r>
+              <a:rPr lang="en-US" sz="2000" baseline="30000" dirty="0"/>
+              <a:t>2</a:t>
+            </a:r>
+            <a:r>
+              <a:rPr lang="en-US" sz="2000" dirty="0"/>
+              <a:t> = 1 Trillion operations)</a:t>
+            </a:r>
+            <a:endParaRPr sz="2000" dirty="0"/>
+          </a:p>
+          <a:p>
+            <a:pPr marL="457200" lvl="0" indent="-355600" algn="l" rtl="0">
+              <a:spcBef>
+                <a:spcPts val="0"/>
+              </a:spcBef>
+              <a:spcAft>
+                <a:spcPts val="0"/>
+              </a:spcAft>
+              <a:buSzPts val="2000"/>
+              <a:buChar char="•"/>
+            </a:pPr>
+            <a:r>
+              <a:rPr lang="en-US" sz="2000" dirty="0"/>
+              <a:t>Key Observation:</a:t>
+            </a:r>
+            <a:endParaRPr sz="2000" dirty="0"/>
+          </a:p>
+          <a:p>
+            <a:pPr marL="914400" lvl="1" indent="-355600" algn="l" rtl="0">
+              <a:lnSpc>
+                <a:spcPct val="115000"/>
+              </a:lnSpc>
+              <a:spcBef>
+                <a:spcPts val="0"/>
+              </a:spcBef>
+              <a:spcAft>
+                <a:spcPts val="0"/>
+              </a:spcAft>
+              <a:buSzPts val="2000"/>
+              <a:buChar char="•"/>
+            </a:pPr>
+            <a:r>
+              <a:rPr lang="en-US" sz="2000" dirty="0"/>
+              <a:t>S contains only prime numbers under 20K.</a:t>
+            </a:r>
+            <a:endParaRPr sz="2000" dirty="0"/>
+          </a:p>
+          <a:p>
+            <a:pPr marL="914400" lvl="1" indent="-355600" algn="l" rtl="0">
+              <a:lnSpc>
+                <a:spcPct val="115000"/>
+              </a:lnSpc>
+              <a:spcBef>
+                <a:spcPts val="0"/>
+              </a:spcBef>
+              <a:spcAft>
+                <a:spcPts val="0"/>
+              </a:spcAft>
+              <a:buSzPts val="2000"/>
+              <a:buChar char="•"/>
+            </a:pPr>
+            <a:r>
+              <a:rPr lang="en-US" sz="2000" dirty="0"/>
+              <a:t>In Book 2 of the textbook we find that π(20’000) = 2262 (prime counting function)</a:t>
+            </a:r>
+            <a:endParaRPr sz="2000" dirty="0"/>
+          </a:p>
+          <a:p>
+            <a:pPr marL="457200" lvl="0" indent="-355600" algn="l" rtl="0">
+              <a:spcBef>
+                <a:spcPts val="0"/>
+              </a:spcBef>
+              <a:spcAft>
+                <a:spcPts val="0"/>
+              </a:spcAft>
+              <a:buSzPts val="2000"/>
+              <a:buChar char="•"/>
+            </a:pPr>
+            <a:r>
+              <a:rPr lang="en-US" sz="2000" dirty="0"/>
+              <a:t>Optimized Approach</a:t>
+            </a:r>
+            <a:endParaRPr sz="2000" dirty="0"/>
+          </a:p>
+          <a:p>
+            <a:pPr marL="914400" lvl="1" indent="-355600" algn="l" rtl="0">
+              <a:spcBef>
+                <a:spcPts val="0"/>
+              </a:spcBef>
+              <a:spcAft>
+                <a:spcPts val="0"/>
+              </a:spcAft>
+              <a:buSzPts val="2000"/>
+              <a:buChar char="•"/>
+            </a:pPr>
+            <a:r>
+              <a:rPr lang="en-US" sz="2000" dirty="0"/>
+              <a:t>There are only 2262 distinct prime numbers under 20K.</a:t>
+            </a:r>
+            <a:endParaRPr sz="2000" dirty="0"/>
+          </a:p>
+          <a:p>
+            <a:pPr marL="914400" lvl="1" indent="-355600" algn="l" rtl="0">
+              <a:spcBef>
+                <a:spcPts val="0"/>
+              </a:spcBef>
+              <a:spcAft>
+                <a:spcPts val="0"/>
+              </a:spcAft>
+              <a:buSzPts val="2000"/>
+              <a:buChar char="•"/>
+            </a:pPr>
+            <a:r>
+              <a:rPr lang="en-US" sz="2000" dirty="0"/>
+              <a:t>Do one O(M) data compression pass to ensure that each integer only has at most 2 copies</a:t>
+            </a:r>
+            <a:endParaRPr sz="2000" dirty="0"/>
+          </a:p>
+          <a:p>
+            <a:pPr marL="1371600" lvl="2" indent="-355600" algn="l" rtl="0">
+              <a:spcBef>
+                <a:spcPts val="0"/>
+              </a:spcBef>
+              <a:spcAft>
+                <a:spcPts val="0"/>
+              </a:spcAft>
+              <a:buSzPts val="2000"/>
+              <a:buChar char="•"/>
+            </a:pPr>
+            <a:r>
+              <a:rPr lang="en-US" sz="2000" dirty="0"/>
+              <a:t>i.e. N ≤ 2x2262</a:t>
+            </a:r>
+            <a:endParaRPr sz="2000" dirty="0"/>
+          </a:p>
+          <a:p>
+            <a:pPr marL="914400" lvl="1" indent="-355600" algn="l" rtl="0">
+              <a:spcBef>
+                <a:spcPts val="0"/>
+              </a:spcBef>
+              <a:spcAft>
+                <a:spcPts val="0"/>
+              </a:spcAft>
+              <a:buSzPts val="2000"/>
+              <a:buChar char="•"/>
+            </a:pPr>
+            <a:r>
+              <a:rPr lang="en-US" sz="2000" dirty="0"/>
+              <a:t>Do O(N</a:t>
+            </a:r>
+            <a:r>
+              <a:rPr lang="en-US" sz="2000" baseline="30000" dirty="0"/>
+              <a:t>2</a:t>
+            </a:r>
+            <a:r>
+              <a:rPr lang="en-US" sz="2000" dirty="0"/>
+              <a:t>) complete search as before but now is ~ 20.5M operations</a:t>
+            </a:r>
+            <a:endParaRPr sz="2000" dirty="0"/>
           </a:p>
         </p:txBody>
       </p:sp>
@@ -40136,8 +40303,8 @@
           </a:p>
         </p:txBody>
       </p:sp>
-      <mc:AlternateContent xmlns:mc="http://schemas.openxmlformats.org/markup-compatibility/2006">
-        <mc:Choice xmlns:a14="http://schemas.microsoft.com/office/drawing/2010/main" Requires="a14">
+      <mc:AlternateContent xmlns:mc="http://schemas.openxmlformats.org/markup-compatibility/2006" xmlns:a14="http://schemas.microsoft.com/office/drawing/2010/main">
+        <mc:Choice Requires="a14">
           <p:sp>
             <p:nvSpPr>
               <p:cNvPr id="224" name="Google Shape;224;g37c4946a550_0_194">
@@ -40186,18 +40353,24 @@
                 <a14:m>
                   <m:oMath xmlns:m="http://schemas.openxmlformats.org/officeDocument/2006/math">
                     <m:r>
-                      <a:rPr lang="en-CA" i="1"/>
+                      <a:rPr lang="en-CA" i="1">
+                        <a:latin typeface="Cambria Math" panose="02040503050406030204" pitchFamily="18" charset="0"/>
+                      </a:rPr>
                       <m:t>𝑓</m:t>
                     </m:r>
                     <m:d>
                       <m:dPr>
                         <m:ctrlPr>
-                          <a:rPr lang="en-CA" i="1"/>
+                          <a:rPr lang="en-CA" i="1">
+                            <a:latin typeface="Cambria Math" panose="02040503050406030204" pitchFamily="18" charset="0"/>
+                          </a:rPr>
                         </m:ctrlPr>
                       </m:dPr>
                       <m:e>
                         <m:r>
-                          <a:rPr lang="en-CA" i="1"/>
+                          <a:rPr lang="en-CA" i="1">
+                            <a:latin typeface="Cambria Math" panose="02040503050406030204" pitchFamily="18" charset="0"/>
+                          </a:rPr>
                           <m:t>𝑥</m:t>
                         </m:r>
                       </m:e>
@@ -40285,64 +40458,86 @@
                     <m:sSub>
                       <m:sSubPr>
                         <m:ctrlPr>
-                          <a:rPr lang="en-CA" i="1"/>
+                          <a:rPr lang="en-CA" i="1">
+                            <a:latin typeface="Cambria Math" panose="02040503050406030204" pitchFamily="18" charset="0"/>
+                          </a:rPr>
                         </m:ctrlPr>
                       </m:sSubPr>
                       <m:e>
                         <m:r>
-                          <a:rPr lang="en-CA" i="1"/>
+                          <a:rPr lang="en-CA" i="1">
+                            <a:latin typeface="Cambria Math" panose="02040503050406030204" pitchFamily="18" charset="0"/>
+                          </a:rPr>
                           <m:t>𝑥</m:t>
                         </m:r>
                       </m:e>
                       <m:sub>
                         <m:r>
-                          <a:rPr lang="en-CA"/>
+                          <a:rPr lang="en-CA">
+                            <a:latin typeface="Cambria Math" panose="02040503050406030204" pitchFamily="18" charset="0"/>
+                          </a:rPr>
                           <m:t>1</m:t>
                         </m:r>
                       </m:sub>
                     </m:sSub>
                     <m:r>
-                      <a:rPr lang="en-CA"/>
+                      <a:rPr lang="en-CA">
+                        <a:latin typeface="Cambria Math" panose="02040503050406030204" pitchFamily="18" charset="0"/>
+                      </a:rPr>
                       <m:t>&lt;</m:t>
                     </m:r>
                     <m:sSub>
                       <m:sSubPr>
                         <m:ctrlPr>
-                          <a:rPr lang="en-CA" i="1"/>
+                          <a:rPr lang="en-CA" i="1">
+                            <a:latin typeface="Cambria Math" panose="02040503050406030204" pitchFamily="18" charset="0"/>
+                          </a:rPr>
                         </m:ctrlPr>
                       </m:sSubPr>
                       <m:e>
                         <m:r>
-                          <a:rPr lang="en-CA" i="1"/>
+                          <a:rPr lang="en-CA" i="1">
+                            <a:latin typeface="Cambria Math" panose="02040503050406030204" pitchFamily="18" charset="0"/>
+                          </a:rPr>
                           <m:t>𝑥</m:t>
                         </m:r>
                       </m:e>
                       <m:sub>
                         <m:r>
-                          <a:rPr lang="en-CA"/>
+                          <a:rPr lang="en-CA">
+                            <a:latin typeface="Cambria Math" panose="02040503050406030204" pitchFamily="18" charset="0"/>
+                          </a:rPr>
                           <m:t>2</m:t>
                         </m:r>
                       </m:sub>
                     </m:sSub>
                     <m:r>
-                      <a:rPr lang="en-CA"/>
+                      <a:rPr lang="en-CA">
+                        <a:latin typeface="Cambria Math" panose="02040503050406030204" pitchFamily="18" charset="0"/>
+                      </a:rPr>
                       <m:t>≤</m:t>
                     </m:r>
                     <m:sSup>
                       <m:sSupPr>
                         <m:ctrlPr>
-                          <a:rPr lang="en-CA" i="1"/>
+                          <a:rPr lang="en-CA" i="1">
+                            <a:latin typeface="Cambria Math" panose="02040503050406030204" pitchFamily="18" charset="0"/>
+                          </a:rPr>
                         </m:ctrlPr>
                       </m:sSupPr>
                       <m:e>
                         <m:r>
-                          <a:rPr lang="en-CA" i="1"/>
+                          <a:rPr lang="en-CA" i="1">
+                            <a:latin typeface="Cambria Math" panose="02040503050406030204" pitchFamily="18" charset="0"/>
+                          </a:rPr>
                           <m:t>𝑥</m:t>
                         </m:r>
                       </m:e>
                       <m:sup>
                         <m:r>
-                          <a:rPr lang="en-CA"/>
+                          <a:rPr lang="en-CA">
+                            <a:latin typeface="Cambria Math" panose="02040503050406030204" pitchFamily="18" charset="0"/>
+                          </a:rPr>
                           <m:t>∗</m:t>
                         </m:r>
                       </m:sup>
@@ -40356,31 +40551,41 @@
                 <a14:m>
                   <m:oMath xmlns:m="http://schemas.openxmlformats.org/officeDocument/2006/math">
                     <m:r>
-                      <a:rPr lang="en-CA" i="1"/>
+                      <a:rPr lang="en-CA" i="1">
+                        <a:latin typeface="Cambria Math" panose="02040503050406030204" pitchFamily="18" charset="0"/>
+                      </a:rPr>
                       <m:t>𝑓</m:t>
                     </m:r>
                     <m:d>
                       <m:dPr>
                         <m:ctrlPr>
-                          <a:rPr lang="en-CA" i="1"/>
+                          <a:rPr lang="en-CA" i="1">
+                            <a:latin typeface="Cambria Math" panose="02040503050406030204" pitchFamily="18" charset="0"/>
+                          </a:rPr>
                         </m:ctrlPr>
                       </m:dPr>
                       <m:e>
                         <m:sSub>
                           <m:sSubPr>
                             <m:ctrlPr>
-                              <a:rPr lang="en-CA" i="1"/>
+                              <a:rPr lang="en-CA" i="1">
+                                <a:latin typeface="Cambria Math" panose="02040503050406030204" pitchFamily="18" charset="0"/>
+                              </a:rPr>
                             </m:ctrlPr>
                           </m:sSubPr>
                           <m:e>
                             <m:r>
-                              <a:rPr lang="en-CA" i="1"/>
+                              <a:rPr lang="en-CA" i="1">
+                                <a:latin typeface="Cambria Math" panose="02040503050406030204" pitchFamily="18" charset="0"/>
+                              </a:rPr>
                               <m:t>𝑥</m:t>
                             </m:r>
                           </m:e>
                           <m:sub>
                             <m:r>
-                              <a:rPr lang="en-CA"/>
+                              <a:rPr lang="en-CA">
+                                <a:latin typeface="Cambria Math" panose="02040503050406030204" pitchFamily="18" charset="0"/>
+                              </a:rPr>
                               <m:t>1</m:t>
                             </m:r>
                           </m:sub>
@@ -40388,35 +40593,47 @@
                       </m:e>
                     </m:d>
                     <m:r>
-                      <a:rPr lang="en-CA"/>
+                      <a:rPr lang="en-CA">
+                        <a:latin typeface="Cambria Math" panose="02040503050406030204" pitchFamily="18" charset="0"/>
+                      </a:rPr>
                       <m:t>&lt;</m:t>
                     </m:r>
                     <m:r>
-                      <a:rPr lang="en-CA" i="1"/>
+                      <a:rPr lang="en-CA" i="1">
+                        <a:latin typeface="Cambria Math" panose="02040503050406030204" pitchFamily="18" charset="0"/>
+                      </a:rPr>
                       <m:t>𝑓</m:t>
                     </m:r>
                     <m:d>
                       <m:dPr>
                         <m:ctrlPr>
-                          <a:rPr lang="en-CA" i="1"/>
+                          <a:rPr lang="en-CA" i="1">
+                            <a:latin typeface="Cambria Math" panose="02040503050406030204" pitchFamily="18" charset="0"/>
+                          </a:rPr>
                         </m:ctrlPr>
                       </m:dPr>
                       <m:e>
                         <m:sSub>
                           <m:sSubPr>
                             <m:ctrlPr>
-                              <a:rPr lang="en-CA" i="1"/>
+                              <a:rPr lang="en-CA" i="1">
+                                <a:latin typeface="Cambria Math" panose="02040503050406030204" pitchFamily="18" charset="0"/>
+                              </a:rPr>
                             </m:ctrlPr>
                           </m:sSubPr>
                           <m:e>
                             <m:r>
-                              <a:rPr lang="en-CA" i="1"/>
+                              <a:rPr lang="en-CA" i="1">
+                                <a:latin typeface="Cambria Math" panose="02040503050406030204" pitchFamily="18" charset="0"/>
+                              </a:rPr>
                               <m:t>𝑥</m:t>
                             </m:r>
                           </m:e>
                           <m:sub>
                             <m:r>
-                              <a:rPr lang="en-CA"/>
+                              <a:rPr lang="en-CA">
+                                <a:latin typeface="Cambria Math" panose="02040503050406030204" pitchFamily="18" charset="0"/>
+                              </a:rPr>
                               <m:t>2</m:t>
                             </m:r>
                           </m:sub>
@@ -40443,64 +40660,86 @@
                     <m:sSup>
                       <m:sSupPr>
                         <m:ctrlPr>
-                          <a:rPr lang="en-CA" i="1"/>
+                          <a:rPr lang="en-CA" i="1">
+                            <a:latin typeface="Cambria Math" panose="02040503050406030204" pitchFamily="18" charset="0"/>
+                          </a:rPr>
                         </m:ctrlPr>
                       </m:sSupPr>
                       <m:e>
                         <m:r>
-                          <a:rPr lang="en-CA" i="1"/>
+                          <a:rPr lang="en-CA" i="1">
+                            <a:latin typeface="Cambria Math" panose="02040503050406030204" pitchFamily="18" charset="0"/>
+                          </a:rPr>
                           <m:t>𝑥</m:t>
                         </m:r>
                       </m:e>
                       <m:sup>
                         <m:r>
-                          <a:rPr lang="en-CA"/>
+                          <a:rPr lang="en-CA">
+                            <a:latin typeface="Cambria Math" panose="02040503050406030204" pitchFamily="18" charset="0"/>
+                          </a:rPr>
                           <m:t>∗</m:t>
                         </m:r>
                       </m:sup>
                     </m:sSup>
                     <m:r>
-                      <a:rPr lang="en-CA"/>
+                      <a:rPr lang="en-CA">
+                        <a:latin typeface="Cambria Math" panose="02040503050406030204" pitchFamily="18" charset="0"/>
+                      </a:rPr>
                       <m:t>≤</m:t>
                     </m:r>
                     <m:sSub>
                       <m:sSubPr>
                         <m:ctrlPr>
-                          <a:rPr lang="en-CA" i="1"/>
+                          <a:rPr lang="en-CA" i="1">
+                            <a:latin typeface="Cambria Math" panose="02040503050406030204" pitchFamily="18" charset="0"/>
+                          </a:rPr>
                         </m:ctrlPr>
                       </m:sSubPr>
                       <m:e>
                         <m:r>
-                          <a:rPr lang="en-CA" i="1"/>
+                          <a:rPr lang="en-CA" i="1">
+                            <a:latin typeface="Cambria Math" panose="02040503050406030204" pitchFamily="18" charset="0"/>
+                          </a:rPr>
                           <m:t>𝑥</m:t>
                         </m:r>
                       </m:e>
                       <m:sub>
                         <m:r>
-                          <a:rPr lang="en-CA"/>
+                          <a:rPr lang="en-CA">
+                            <a:latin typeface="Cambria Math" panose="02040503050406030204" pitchFamily="18" charset="0"/>
+                          </a:rPr>
                           <m:t>1</m:t>
                         </m:r>
                       </m:sub>
                     </m:sSub>
                     <m:r>
-                      <a:rPr lang="en-CA"/>
+                      <a:rPr lang="en-CA">
+                        <a:latin typeface="Cambria Math" panose="02040503050406030204" pitchFamily="18" charset="0"/>
+                      </a:rPr>
                       <m:t>&lt;</m:t>
                     </m:r>
                     <m:sSub>
                       <m:sSubPr>
                         <m:ctrlPr>
-                          <a:rPr lang="en-CA" i="1"/>
+                          <a:rPr lang="en-CA" i="1">
+                            <a:latin typeface="Cambria Math" panose="02040503050406030204" pitchFamily="18" charset="0"/>
+                          </a:rPr>
                         </m:ctrlPr>
                       </m:sSubPr>
                       <m:e>
                         <m:r>
-                          <a:rPr lang="en-CA" i="1"/>
+                          <a:rPr lang="en-CA" i="1">
+                            <a:latin typeface="Cambria Math" panose="02040503050406030204" pitchFamily="18" charset="0"/>
+                          </a:rPr>
                           <m:t>𝑥</m:t>
                         </m:r>
                       </m:e>
                       <m:sub>
                         <m:r>
-                          <a:rPr lang="en-CA"/>
+                          <a:rPr lang="en-CA">
+                            <a:latin typeface="Cambria Math" panose="02040503050406030204" pitchFamily="18" charset="0"/>
+                          </a:rPr>
                           <m:t>2</m:t>
                         </m:r>
                       </m:sub>
@@ -40514,31 +40753,41 @@
                 <a14:m>
                   <m:oMath xmlns:m="http://schemas.openxmlformats.org/officeDocument/2006/math">
                     <m:r>
-                      <a:rPr lang="en-CA" i="1"/>
+                      <a:rPr lang="en-CA" i="1">
+                        <a:latin typeface="Cambria Math" panose="02040503050406030204" pitchFamily="18" charset="0"/>
+                      </a:rPr>
                       <m:t>𝑓</m:t>
                     </m:r>
                     <m:d>
                       <m:dPr>
                         <m:ctrlPr>
-                          <a:rPr lang="en-CA" i="1"/>
+                          <a:rPr lang="en-CA" i="1">
+                            <a:latin typeface="Cambria Math" panose="02040503050406030204" pitchFamily="18" charset="0"/>
+                          </a:rPr>
                         </m:ctrlPr>
                       </m:dPr>
                       <m:e>
                         <m:sSub>
                           <m:sSubPr>
                             <m:ctrlPr>
-                              <a:rPr lang="en-CA" i="1"/>
+                              <a:rPr lang="en-CA" i="1">
+                                <a:latin typeface="Cambria Math" panose="02040503050406030204" pitchFamily="18" charset="0"/>
+                              </a:rPr>
                             </m:ctrlPr>
                           </m:sSubPr>
                           <m:e>
                             <m:r>
-                              <a:rPr lang="en-CA" i="1"/>
+                              <a:rPr lang="en-CA" i="1">
+                                <a:latin typeface="Cambria Math" panose="02040503050406030204" pitchFamily="18" charset="0"/>
+                              </a:rPr>
                               <m:t>𝑥</m:t>
                             </m:r>
                           </m:e>
                           <m:sub>
                             <m:r>
-                              <a:rPr lang="en-CA"/>
+                              <a:rPr lang="en-CA">
+                                <a:latin typeface="Cambria Math" panose="02040503050406030204" pitchFamily="18" charset="0"/>
+                              </a:rPr>
                               <m:t>1</m:t>
                             </m:r>
                           </m:sub>
@@ -40546,35 +40795,47 @@
                       </m:e>
                     </m:d>
                     <m:r>
-                      <a:rPr lang="en-CA"/>
+                      <a:rPr lang="en-CA">
+                        <a:latin typeface="Cambria Math" panose="02040503050406030204" pitchFamily="18" charset="0"/>
+                      </a:rPr>
                       <m:t>&gt;</m:t>
                     </m:r>
                     <m:r>
-                      <a:rPr lang="en-CA" i="1"/>
+                      <a:rPr lang="en-CA" i="1">
+                        <a:latin typeface="Cambria Math" panose="02040503050406030204" pitchFamily="18" charset="0"/>
+                      </a:rPr>
                       <m:t>𝑓</m:t>
                     </m:r>
                     <m:d>
                       <m:dPr>
                         <m:ctrlPr>
-                          <a:rPr lang="en-CA" i="1"/>
+                          <a:rPr lang="en-CA" i="1">
+                            <a:latin typeface="Cambria Math" panose="02040503050406030204" pitchFamily="18" charset="0"/>
+                          </a:rPr>
                         </m:ctrlPr>
                       </m:dPr>
                       <m:e>
                         <m:sSub>
                           <m:sSubPr>
                             <m:ctrlPr>
-                              <a:rPr lang="en-CA" i="1"/>
+                              <a:rPr lang="en-CA" i="1">
+                                <a:latin typeface="Cambria Math" panose="02040503050406030204" pitchFamily="18" charset="0"/>
+                              </a:rPr>
                             </m:ctrlPr>
                           </m:sSubPr>
                           <m:e>
                             <m:r>
-                              <a:rPr lang="en-CA" i="1"/>
+                              <a:rPr lang="en-CA" i="1">
+                                <a:latin typeface="Cambria Math" panose="02040503050406030204" pitchFamily="18" charset="0"/>
+                              </a:rPr>
                               <m:t>𝑥</m:t>
                             </m:r>
                           </m:e>
                           <m:sub>
                             <m:r>
-                              <a:rPr lang="en-CA"/>
+                              <a:rPr lang="en-CA">
+                                <a:latin typeface="Cambria Math" panose="02040503050406030204" pitchFamily="18" charset="0"/>
+                              </a:rPr>
                               <m:t>2</m:t>
                             </m:r>
                           </m:sub>
@@ -40670,7 +40931,7 @@
             </p:txBody>
           </p:sp>
         </mc:Choice>
-        <mc:Fallback>
+        <mc:Fallback xmlns="">
           <p:sp>
             <p:nvSpPr>
               <p:cNvPr id="224" name="Google Shape;224;g37c4946a550_0_194">
@@ -42324,8 +42585,8 @@
         </p:nvSpPr>
         <p:spPr>
           <a:xfrm>
-            <a:off x="494675" y="1096825"/>
-            <a:ext cx="11231400" cy="4081350"/>
+            <a:off x="494675" y="1096824"/>
+            <a:ext cx="11231400" cy="5221913"/>
           </a:xfrm>
           <a:prstGeom prst="rect">
             <a:avLst/>
@@ -42445,7 +42706,7 @@
             </a:pPr>
             <a:r>
               <a:rPr lang="en-US" sz="2000" dirty="0"/>
-              <a:t>The Goal in CP: To define the search space clearly and find the fastest algorithm to navigate it without triggering a Time Limit Exceeded (TLE) verdict.</a:t>
+              <a:t>The Goal: To define the search space clearly and find the fastest algorithm to navigate it without triggering a Time Limit Exceeded (TLE) verdict.</a:t>
             </a:r>
           </a:p>
         </p:txBody>
@@ -43338,7 +43599,7 @@
             </a:pPr>
             <a:r>
               <a:rPr lang="en-US" sz="2000" dirty="0"/>
-              <a:t>The Golden Rule of Binary Search:</a:t>
+              <a:t>Requirement for Binary Search:</a:t>
             </a:r>
           </a:p>
           <a:p>
@@ -44143,7 +44404,10 @@
               <a:rPr lang="en-US" sz="2000" dirty="0" err="1"/>
               <a:t>itertools</a:t>
             </a:r>
-            <a:endParaRPr lang="en-US" sz="2000" dirty="0"/>
+            <a:r>
+              <a:rPr lang="en-US" sz="2000" dirty="0"/>
+              <a:t> very powerful combination library!</a:t>
+            </a:r>
           </a:p>
           <a:p>
             <a:pPr lvl="1" indent="-355600">
@@ -45010,7 +45274,7 @@
               <a:buChar char="•"/>
             </a:pPr>
             <a:r>
-              <a:rPr lang="en-US" sz="2000"/>
+              <a:rPr lang="en-US" sz="2000" dirty="0"/>
               <a:t>The Concept:</a:t>
             </a:r>
           </a:p>
@@ -45022,15 +45286,15 @@
               <a:buSzPts val="2000"/>
             </a:pPr>
             <a:r>
-              <a:rPr lang="en-US" sz="1800"/>
+              <a:rPr lang="en-US" sz="1800" dirty="0"/>
               <a:t>We can represent a subset of items using an integer (a bitmask). The </a:t>
             </a:r>
             <a:r>
-              <a:rPr lang="en-US" sz="1800" err="1"/>
+              <a:rPr lang="en-US" sz="1800" dirty="0" err="1"/>
               <a:t>i-th</a:t>
             </a:r>
             <a:r>
-              <a:rPr lang="en-US" sz="1800"/>
+              <a:rPr lang="en-US" sz="1800" dirty="0"/>
               <a:t> bit is 1 if the item is included, and 0 if it is not.</a:t>
             </a:r>
           </a:p>
@@ -45042,7 +45306,7 @@
               <a:buSzPts val="2000"/>
             </a:pPr>
             <a:r>
-              <a:rPr lang="en-US" sz="1800"/>
+              <a:rPr lang="en-US" sz="1800" dirty="0"/>
               <a:t>For a set of N items, simply iterating from 0 to 2^N - 1 generates all possible global subsets.</a:t>
             </a:r>
           </a:p>
@@ -45054,15 +45318,15 @@
               <a:buSzPts val="2000"/>
             </a:pPr>
             <a:r>
-              <a:rPr lang="en-US" sz="2000"/>
+              <a:rPr lang="en-US" sz="2000" dirty="0"/>
               <a:t>The </a:t>
             </a:r>
             <a:r>
-              <a:rPr lang="en-US" sz="2000" err="1"/>
+              <a:rPr lang="en-US" sz="2000" dirty="0" err="1"/>
               <a:t>Submask</a:t>
             </a:r>
             <a:r>
-              <a:rPr lang="en-US" sz="2000"/>
+              <a:rPr lang="en-US" sz="2000" dirty="0"/>
               <a:t> Problem:</a:t>
             </a:r>
           </a:p>
@@ -45074,15 +45338,15 @@
               <a:buSzPts val="2000"/>
             </a:pPr>
             <a:r>
-              <a:rPr lang="en-US" sz="1800"/>
+              <a:rPr lang="en-US" sz="1800" dirty="0"/>
               <a:t>What if you only want to find all subsets of an already existing subset (a </a:t>
             </a:r>
             <a:r>
-              <a:rPr lang="en-US" sz="1800" err="1"/>
+              <a:rPr lang="en-US" sz="1800" dirty="0" err="1"/>
               <a:t>submask</a:t>
             </a:r>
             <a:r>
-              <a:rPr lang="en-US" sz="1800"/>
+              <a:rPr lang="en-US" sz="1800" dirty="0"/>
               <a:t>)?</a:t>
             </a:r>
           </a:p>
@@ -45094,7 +45358,7 @@
               <a:buSzPts val="2000"/>
             </a:pPr>
             <a:r>
-              <a:rPr lang="en-US" sz="1800"/>
+              <a:rPr lang="en-US" sz="1800" dirty="0"/>
               <a:t>Iterating through all 2^N possibilities and filtering them is too slow.</a:t>
             </a:r>
           </a:p>
@@ -45106,7 +45370,7 @@
               <a:buSzPts val="2000"/>
             </a:pPr>
             <a:r>
-              <a:rPr lang="en-US" sz="2000"/>
+              <a:rPr lang="en-US" sz="2000" dirty="0"/>
               <a:t>The Bitwise Solution:</a:t>
             </a:r>
           </a:p>
@@ -45118,7 +45382,7 @@
               <a:buSzPts val="2000"/>
             </a:pPr>
             <a:r>
-              <a:rPr lang="en-US" sz="1800"/>
+              <a:rPr lang="en-US" sz="1800" dirty="0"/>
               <a:t>subset = (mask &amp; (subset - 1)) is the core logic.</a:t>
             </a:r>
           </a:p>
@@ -45130,7 +45394,7 @@
               <a:buSzPts val="2000"/>
             </a:pPr>
             <a:r>
-              <a:rPr lang="en-US" sz="1800"/>
+              <a:rPr lang="en-US" sz="1800" dirty="0"/>
               <a:t>Subtracting 1 from subset flips its lowest set bit to 0 and turns all lower 0s into 1s.</a:t>
             </a:r>
           </a:p>
@@ -45142,7 +45406,7 @@
               <a:buSzPts val="2000"/>
             </a:pPr>
             <a:r>
-              <a:rPr lang="en-US" sz="1800"/>
+              <a:rPr lang="en-US" sz="1800" dirty="0"/>
               <a:t>The bitwise &amp; with the original mask acts as a filter, instantly turning off any newly created 1s that don't belong to the parent mask.</a:t>
             </a:r>
           </a:p>
@@ -45154,15 +45418,15 @@
               <a:buSzPts val="2000"/>
             </a:pPr>
             <a:r>
-              <a:rPr lang="en-US" sz="1800"/>
+              <a:rPr lang="en-US" sz="1800" dirty="0"/>
               <a:t>Result: It generates every valid </a:t>
             </a:r>
             <a:r>
-              <a:rPr lang="en-US" sz="1800" err="1"/>
+              <a:rPr lang="en-US" sz="1800" dirty="0" err="1"/>
               <a:t>submask</a:t>
             </a:r>
             <a:r>
-              <a:rPr lang="en-US" sz="1800"/>
+              <a:rPr lang="en-US" sz="1800" dirty="0"/>
               <a:t> in strictly decreasing order (e.g., for mask = 18 or 10010, it perfectly yields 18, 16, 2, and 0) without wasting cycles on invalid states.</a:t>
             </a:r>
           </a:p>
@@ -45173,7 +45437,7 @@
               </a:spcBef>
               <a:buSzPts val="2000"/>
             </a:pPr>
-            <a:endParaRPr lang="en-US" sz="2000"/>
+            <a:endParaRPr lang="en-US" sz="2000" dirty="0"/>
           </a:p>
           <a:p>
             <a:pPr lvl="1" indent="-355600">
@@ -45182,7 +45446,7 @@
               </a:spcBef>
               <a:buSzPts val="2000"/>
             </a:pPr>
-            <a:endParaRPr lang="en-US" sz="1800"/>
+            <a:endParaRPr lang="en-US" sz="1800" dirty="0"/>
           </a:p>
         </p:txBody>
       </p:sp>
@@ -45770,7 +46034,7 @@
                                         <p:tgtEl>
                                           <p:spTgt spid="224">
                                             <p:txEl>
-                                              <p:charRg st="13" end="141"/>
+                                              <p:pRg st="1" end="1"/>
                                             </p:txEl>
                                           </p:spTgt>
                                         </p:tgtEl>
@@ -45801,7 +46065,7 @@
                                         <p:tgtEl>
                                           <p:spTgt spid="224">
                                             <p:txEl>
-                                              <p:charRg st="141" end="237"/>
+                                              <p:pRg st="2" end="2"/>
                                             </p:txEl>
                                           </p:spTgt>
                                         </p:tgtEl>
@@ -45850,7 +46114,7 @@
                                         <p:tgtEl>
                                           <p:spTgt spid="224">
                                             <p:txEl>
-                                              <p:charRg st="237" end="258"/>
+                                              <p:pRg st="3" end="3"/>
                                             </p:txEl>
                                           </p:spTgt>
                                         </p:tgtEl>
@@ -45881,7 +46145,7 @@
                                         <p:tgtEl>
                                           <p:spTgt spid="224">
                                             <p:txEl>
-                                              <p:charRg st="258" end="343"/>
+                                              <p:pRg st="4" end="4"/>
                                             </p:txEl>
                                           </p:spTgt>
                                         </p:tgtEl>
@@ -45912,7 +46176,7 @@
                                         <p:tgtEl>
                                           <p:spTgt spid="224">
                                             <p:txEl>
-                                              <p:charRg st="343" end="415"/>
+                                              <p:pRg st="5" end="5"/>
                                             </p:txEl>
                                           </p:spTgt>
                                         </p:tgtEl>
@@ -45961,7 +46225,7 @@
                                         <p:tgtEl>
                                           <p:spTgt spid="224">
                                             <p:txEl>
-                                              <p:charRg st="415" end="437"/>
+                                              <p:pRg st="6" end="6"/>
                                             </p:txEl>
                                           </p:spTgt>
                                         </p:tgtEl>
@@ -45992,7 +46256,7 @@
                                         <p:tgtEl>
                                           <p:spTgt spid="224">
                                             <p:txEl>
-                                              <p:charRg st="437" end="487"/>
+                                              <p:pRg st="7" end="7"/>
                                             </p:txEl>
                                           </p:spTgt>
                                         </p:tgtEl>
@@ -46023,7 +46287,7 @@
                                         <p:tgtEl>
                                           <p:spTgt spid="224">
                                             <p:txEl>
-                                              <p:charRg st="487" end="575"/>
+                                              <p:pRg st="8" end="8"/>
                                             </p:txEl>
                                           </p:spTgt>
                                         </p:tgtEl>
@@ -46054,7 +46318,7 @@
                                         <p:tgtEl>
                                           <p:spTgt spid="224">
                                             <p:txEl>
-                                              <p:charRg st="575" end="711"/>
+                                              <p:pRg st="9" end="9"/>
                                             </p:txEl>
                                           </p:spTgt>
                                         </p:tgtEl>
@@ -46085,7 +46349,7 @@
                                         <p:tgtEl>
                                           <p:spTgt spid="224">
                                             <p:txEl>
-                                              <p:charRg st="711" end="892"/>
+                                              <p:pRg st="10" end="10"/>
                                             </p:txEl>
                                           </p:spTgt>
                                         </p:tgtEl>
@@ -46214,649 +46478,6 @@
         <p:cNvPr id="1" name="Shape 222">
           <a:extLst>
             <a:ext uri="{FF2B5EF4-FFF2-40B4-BE49-F238E27FC236}">
-              <a16:creationId xmlns:a16="http://schemas.microsoft.com/office/drawing/2014/main" id="{D7B05EDB-1DA0-3AFE-2703-F7AFA0A2A6BC}"/>
-            </a:ext>
-          </a:extLst>
-        </p:cNvPr>
-        <p:cNvGrpSpPr/>
-        <p:nvPr/>
-      </p:nvGrpSpPr>
-      <p:grpSpPr>
-        <a:xfrm>
-          <a:off x="0" y="0"/>
-          <a:ext cx="0" cy="0"/>
-          <a:chOff x="0" y="0"/>
-          <a:chExt cx="0" cy="0"/>
-        </a:xfrm>
-      </p:grpSpPr>
-      <p:sp>
-        <p:nvSpPr>
-          <p:cNvPr id="223" name="Google Shape;223;g37c4946a550_0_194">
-            <a:extLst>
-              <a:ext uri="{FF2B5EF4-FFF2-40B4-BE49-F238E27FC236}">
-                <a16:creationId xmlns:a16="http://schemas.microsoft.com/office/drawing/2014/main" id="{CA1F0E7B-43E3-0C0A-2E01-3E046B4E0835}"/>
-              </a:ext>
-            </a:extLst>
-          </p:cNvPr>
-          <p:cNvSpPr txBox="1">
-            <a:spLocks noGrp="1"/>
-          </p:cNvSpPr>
-          <p:nvPr>
-            <p:ph type="title"/>
-          </p:nvPr>
-        </p:nvSpPr>
-        <p:spPr>
-          <a:xfrm>
-            <a:off x="2231136" y="228421"/>
-            <a:ext cx="7729800" cy="662100"/>
-          </a:xfrm>
-          <a:prstGeom prst="rect">
-            <a:avLst/>
-          </a:prstGeom>
-          <a:solidFill>
-            <a:srgbClr val="FFFFFF"/>
-          </a:solidFill>
-          <a:ln w="31750" cap="sq" cmpd="sng">
-            <a:solidFill>
-              <a:srgbClr val="404040"/>
-            </a:solidFill>
-            <a:prstDash val="solid"/>
-            <a:miter lim="800000"/>
-            <a:headEnd type="none" w="sm" len="sm"/>
-            <a:tailEnd type="none" w="sm" len="sm"/>
-          </a:ln>
-        </p:spPr>
-        <p:txBody>
-          <a:bodyPr spcFirstLastPara="1" wrap="square" lIns="182875" tIns="182875" rIns="182875" bIns="182875" anchor="ctr" anchorCtr="0">
-            <a:normAutofit fontScale="90000"/>
-          </a:bodyPr>
-          <a:lstStyle/>
-          <a:p>
-            <a:pPr marL="0" lvl="0" indent="0" algn="ctr" rtl="0">
-              <a:lnSpc>
-                <a:spcPct val="90000"/>
-              </a:lnSpc>
-              <a:spcBef>
-                <a:spcPts val="0"/>
-              </a:spcBef>
-              <a:spcAft>
-                <a:spcPts val="0"/>
-              </a:spcAft>
-              <a:buClr>
-                <a:srgbClr val="262626"/>
-              </a:buClr>
-              <a:buSzPct val="100000"/>
-              <a:buFont typeface="Gill Sans"/>
-              <a:buNone/>
-            </a:pPr>
-            <a:r>
-              <a:rPr lang="en-US" dirty="0"/>
-              <a:t>Recursion Review</a:t>
-            </a:r>
-            <a:endParaRPr dirty="0"/>
-          </a:p>
-        </p:txBody>
-      </p:sp>
-      <p:sp>
-        <p:nvSpPr>
-          <p:cNvPr id="224" name="Google Shape;224;g37c4946a550_0_194">
-            <a:extLst>
-              <a:ext uri="{FF2B5EF4-FFF2-40B4-BE49-F238E27FC236}">
-                <a16:creationId xmlns:a16="http://schemas.microsoft.com/office/drawing/2014/main" id="{28E1379E-5FB2-E855-6079-F33982AFF246}"/>
-              </a:ext>
-            </a:extLst>
-          </p:cNvPr>
-          <p:cNvSpPr txBox="1">
-            <a:spLocks noGrp="1"/>
-          </p:cNvSpPr>
-          <p:nvPr>
-            <p:ph type="body" idx="1"/>
-          </p:nvPr>
-        </p:nvSpPr>
-        <p:spPr>
-          <a:xfrm>
-            <a:off x="494675" y="1096825"/>
-            <a:ext cx="11231400" cy="2946538"/>
-          </a:xfrm>
-          <a:prstGeom prst="rect">
-            <a:avLst/>
-          </a:prstGeom>
-          <a:noFill/>
-          <a:ln>
-            <a:noFill/>
-          </a:ln>
-        </p:spPr>
-        <p:txBody>
-          <a:bodyPr spcFirstLastPara="1" wrap="square" lIns="91425" tIns="45700" rIns="91425" bIns="45700" anchor="t" anchorCtr="0">
-            <a:normAutofit/>
-          </a:bodyPr>
-          <a:lstStyle/>
-          <a:p>
-            <a:pPr marL="457200" lvl="0" indent="-355600" algn="l" rtl="0">
-              <a:spcBef>
-                <a:spcPts val="0"/>
-              </a:spcBef>
-              <a:spcAft>
-                <a:spcPts val="0"/>
-              </a:spcAft>
-              <a:buSzPts val="2000"/>
-              <a:buChar char="•"/>
-            </a:pPr>
-            <a:r>
-              <a:rPr lang="en-US" sz="2000"/>
-              <a:t>Definition: </a:t>
-            </a:r>
-          </a:p>
-          <a:p>
-            <a:pPr lvl="1" indent="-355600">
-              <a:spcBef>
-                <a:spcPts val="0"/>
-              </a:spcBef>
-              <a:buSzPts val="2000"/>
-            </a:pPr>
-            <a:r>
-              <a:rPr lang="en-US" sz="1800"/>
-              <a:t>Programming technique where a function calls itself to solve smaller instances of the same problem</a:t>
-            </a:r>
-          </a:p>
-          <a:p>
-            <a:pPr marL="457200" lvl="0" indent="-355600" algn="l" rtl="0">
-              <a:spcBef>
-                <a:spcPts val="0"/>
-              </a:spcBef>
-              <a:spcAft>
-                <a:spcPts val="0"/>
-              </a:spcAft>
-              <a:buSzPts val="2000"/>
-              <a:buChar char="•"/>
-            </a:pPr>
-            <a:r>
-              <a:rPr lang="en-US" sz="2000"/>
-              <a:t>Two Golden Rules:</a:t>
-            </a:r>
-          </a:p>
-          <a:p>
-            <a:pPr lvl="1" indent="-355600">
-              <a:spcBef>
-                <a:spcPts val="0"/>
-              </a:spcBef>
-              <a:buSzPts val="2000"/>
-            </a:pPr>
-            <a:r>
-              <a:rPr lang="en-US" sz="1800"/>
-              <a:t>Base Case: Condition that stops the recursion. Without it, your program will crash with a Stack Overflow.</a:t>
-            </a:r>
-          </a:p>
-          <a:p>
-            <a:pPr lvl="1" indent="-355600">
-              <a:spcBef>
-                <a:spcPts val="0"/>
-              </a:spcBef>
-              <a:buSzPts val="2000"/>
-            </a:pPr>
-            <a:r>
-              <a:rPr lang="en-US" sz="1800"/>
-              <a:t>Recursive Step: The part where the function processes a piece of the data and calls itself with the remaining data, moving closer to the base case.</a:t>
-            </a:r>
-          </a:p>
-          <a:p>
-            <a:pPr indent="-355600">
-              <a:spcBef>
-                <a:spcPts val="0"/>
-              </a:spcBef>
-              <a:buSzPts val="2000"/>
-            </a:pPr>
-            <a:r>
-              <a:rPr lang="en-US" sz="2000"/>
-              <a:t>The Call Stack:</a:t>
-            </a:r>
-          </a:p>
-          <a:p>
-            <a:pPr lvl="1" indent="-355600">
-              <a:spcBef>
-                <a:spcPts val="0"/>
-              </a:spcBef>
-              <a:buSzPts val="2000"/>
-            </a:pPr>
-            <a:r>
-              <a:rPr lang="en-US" sz="1800"/>
-              <a:t>Each time a function calls itself, the computer pauses the current execution and pushes the new call onto the memory stack.</a:t>
-            </a:r>
-          </a:p>
-          <a:p>
-            <a:pPr lvl="1" indent="-355600">
-              <a:spcBef>
-                <a:spcPts val="0"/>
-              </a:spcBef>
-              <a:buSzPts val="2000"/>
-            </a:pPr>
-            <a:r>
-              <a:rPr lang="en-US" sz="1800"/>
-              <a:t>Once a base case is reached, the stack "unwinds," returning values back up the chain.</a:t>
-            </a:r>
-          </a:p>
-        </p:txBody>
-      </p:sp>
-      <p:pic>
-        <p:nvPicPr>
-          <p:cNvPr id="2" name="Picture 1">
-            <a:extLst>
-              <a:ext uri="{FF2B5EF4-FFF2-40B4-BE49-F238E27FC236}">
-                <a16:creationId xmlns:a16="http://schemas.microsoft.com/office/drawing/2014/main" id="{852C3AFC-F3F4-3F1B-EE75-09D97DD8D1A9}"/>
-              </a:ext>
-            </a:extLst>
-          </p:cNvPr>
-          <p:cNvPicPr>
-            <a:picLocks noChangeAspect="1"/>
-          </p:cNvPicPr>
-          <p:nvPr/>
-        </p:nvPicPr>
-        <p:blipFill>
-          <a:blip r:embed="rId3"/>
-          <a:stretch>
-            <a:fillRect/>
-          </a:stretch>
-        </p:blipFill>
-        <p:spPr>
-          <a:xfrm>
-            <a:off x="3259137" y="4197529"/>
-            <a:ext cx="5359400" cy="2374900"/>
-          </a:xfrm>
-          <a:prstGeom prst="rect">
-            <a:avLst/>
-          </a:prstGeom>
-        </p:spPr>
-      </p:pic>
-    </p:spTree>
-    <p:extLst>
-      <p:ext uri="{BB962C8B-B14F-4D97-AF65-F5344CB8AC3E}">
-        <p14:creationId xmlns:p14="http://schemas.microsoft.com/office/powerpoint/2010/main" val="1069514416"/>
-      </p:ext>
-    </p:extLst>
-  </p:cSld>
-  <p:clrMapOvr>
-    <a:masterClrMapping/>
-  </p:clrMapOvr>
-  <p:timing>
-    <p:tnLst>
-      <p:par>
-        <p:cTn id="1" dur="indefinite" restart="never" nodeType="tmRoot">
-          <p:childTnLst>
-            <p:seq concurrent="1" nextAc="seek">
-              <p:cTn id="2" dur="indefinite" nodeType="mainSeq">
-                <p:childTnLst>
-                  <p:par>
-                    <p:cTn id="3" fill="hold">
-                      <p:stCondLst>
-                        <p:cond delay="indefinite"/>
-                      </p:stCondLst>
-                      <p:childTnLst>
-                        <p:par>
-                          <p:cTn id="4" fill="hold">
-                            <p:stCondLst>
-                              <p:cond delay="0"/>
-                            </p:stCondLst>
-                            <p:childTnLst>
-                              <p:par>
-                                <p:cTn id="5" presetID="1" presetClass="entr" presetSubtype="0" fill="hold" nodeType="clickEffect">
-                                  <p:stCondLst>
-                                    <p:cond delay="0"/>
-                                  </p:stCondLst>
-                                  <p:childTnLst>
-                                    <p:set>
-                                      <p:cBhvr>
-                                        <p:cTn id="6" dur="1" fill="hold">
-                                          <p:stCondLst>
-                                            <p:cond delay="0"/>
-                                          </p:stCondLst>
-                                        </p:cTn>
-                                        <p:tgtEl>
-                                          <p:spTgt spid="224">
-                                            <p:txEl>
-                                              <p:pRg st="0" end="0"/>
-                                            </p:txEl>
-                                          </p:spTgt>
-                                        </p:tgtEl>
-                                        <p:attrNameLst>
-                                          <p:attrName>style.visibility</p:attrName>
-                                        </p:attrNameLst>
-                                      </p:cBhvr>
-                                      <p:to>
-                                        <p:strVal val="visible"/>
-                                      </p:to>
-                                    </p:set>
-                                  </p:childTnLst>
-                                </p:cTn>
-                              </p:par>
-                            </p:childTnLst>
-                          </p:cTn>
-                        </p:par>
-                      </p:childTnLst>
-                    </p:cTn>
-                  </p:par>
-                  <p:par>
-                    <p:cTn id="7" fill="hold">
-                      <p:stCondLst>
-                        <p:cond delay="indefinite"/>
-                      </p:stCondLst>
-                      <p:childTnLst>
-                        <p:par>
-                          <p:cTn id="8" fill="hold">
-                            <p:stCondLst>
-                              <p:cond delay="0"/>
-                            </p:stCondLst>
-                            <p:childTnLst>
-                              <p:par>
-                                <p:cTn id="9" presetID="1" presetClass="entr" presetSubtype="0" fill="hold" nodeType="clickEffect">
-                                  <p:stCondLst>
-                                    <p:cond delay="0"/>
-                                  </p:stCondLst>
-                                  <p:childTnLst>
-                                    <p:set>
-                                      <p:cBhvr>
-                                        <p:cTn id="10" dur="1" fill="hold">
-                                          <p:stCondLst>
-                                            <p:cond delay="0"/>
-                                          </p:stCondLst>
-                                        </p:cTn>
-                                        <p:tgtEl>
-                                          <p:spTgt spid="224">
-                                            <p:txEl>
-                                              <p:pRg st="1" end="1"/>
-                                            </p:txEl>
-                                          </p:spTgt>
-                                        </p:tgtEl>
-                                        <p:attrNameLst>
-                                          <p:attrName>style.visibility</p:attrName>
-                                        </p:attrNameLst>
-                                      </p:cBhvr>
-                                      <p:to>
-                                        <p:strVal val="visible"/>
-                                      </p:to>
-                                    </p:set>
-                                  </p:childTnLst>
-                                </p:cTn>
-                              </p:par>
-                            </p:childTnLst>
-                          </p:cTn>
-                        </p:par>
-                      </p:childTnLst>
-                    </p:cTn>
-                  </p:par>
-                  <p:par>
-                    <p:cTn id="11" fill="hold">
-                      <p:stCondLst>
-                        <p:cond delay="indefinite"/>
-                      </p:stCondLst>
-                      <p:childTnLst>
-                        <p:par>
-                          <p:cTn id="12" fill="hold">
-                            <p:stCondLst>
-                              <p:cond delay="0"/>
-                            </p:stCondLst>
-                            <p:childTnLst>
-                              <p:par>
-                                <p:cTn id="13" presetID="1" presetClass="entr" presetSubtype="0" fill="hold" nodeType="clickEffect">
-                                  <p:stCondLst>
-                                    <p:cond delay="0"/>
-                                  </p:stCondLst>
-                                  <p:childTnLst>
-                                    <p:set>
-                                      <p:cBhvr>
-                                        <p:cTn id="14" dur="1" fill="hold">
-                                          <p:stCondLst>
-                                            <p:cond delay="0"/>
-                                          </p:stCondLst>
-                                        </p:cTn>
-                                        <p:tgtEl>
-                                          <p:spTgt spid="224">
-                                            <p:txEl>
-                                              <p:pRg st="2" end="2"/>
-                                            </p:txEl>
-                                          </p:spTgt>
-                                        </p:tgtEl>
-                                        <p:attrNameLst>
-                                          <p:attrName>style.visibility</p:attrName>
-                                        </p:attrNameLst>
-                                      </p:cBhvr>
-                                      <p:to>
-                                        <p:strVal val="visible"/>
-                                      </p:to>
-                                    </p:set>
-                                  </p:childTnLst>
-                                </p:cTn>
-                              </p:par>
-                            </p:childTnLst>
-                          </p:cTn>
-                        </p:par>
-                      </p:childTnLst>
-                    </p:cTn>
-                  </p:par>
-                  <p:par>
-                    <p:cTn id="15" fill="hold">
-                      <p:stCondLst>
-                        <p:cond delay="indefinite"/>
-                      </p:stCondLst>
-                      <p:childTnLst>
-                        <p:par>
-                          <p:cTn id="16" fill="hold">
-                            <p:stCondLst>
-                              <p:cond delay="0"/>
-                            </p:stCondLst>
-                            <p:childTnLst>
-                              <p:par>
-                                <p:cTn id="17" presetID="1" presetClass="entr" presetSubtype="0" fill="hold" nodeType="clickEffect">
-                                  <p:stCondLst>
-                                    <p:cond delay="0"/>
-                                  </p:stCondLst>
-                                  <p:childTnLst>
-                                    <p:set>
-                                      <p:cBhvr>
-                                        <p:cTn id="18" dur="1" fill="hold">
-                                          <p:stCondLst>
-                                            <p:cond delay="0"/>
-                                          </p:stCondLst>
-                                        </p:cTn>
-                                        <p:tgtEl>
-                                          <p:spTgt spid="224">
-                                            <p:txEl>
-                                              <p:pRg st="3" end="3"/>
-                                            </p:txEl>
-                                          </p:spTgt>
-                                        </p:tgtEl>
-                                        <p:attrNameLst>
-                                          <p:attrName>style.visibility</p:attrName>
-                                        </p:attrNameLst>
-                                      </p:cBhvr>
-                                      <p:to>
-                                        <p:strVal val="visible"/>
-                                      </p:to>
-                                    </p:set>
-                                  </p:childTnLst>
-                                </p:cTn>
-                              </p:par>
-                            </p:childTnLst>
-                          </p:cTn>
-                        </p:par>
-                      </p:childTnLst>
-                    </p:cTn>
-                  </p:par>
-                  <p:par>
-                    <p:cTn id="19" fill="hold">
-                      <p:stCondLst>
-                        <p:cond delay="indefinite"/>
-                      </p:stCondLst>
-                      <p:childTnLst>
-                        <p:par>
-                          <p:cTn id="20" fill="hold">
-                            <p:stCondLst>
-                              <p:cond delay="0"/>
-                            </p:stCondLst>
-                            <p:childTnLst>
-                              <p:par>
-                                <p:cTn id="21" presetID="1" presetClass="entr" presetSubtype="0" fill="hold" nodeType="clickEffect">
-                                  <p:stCondLst>
-                                    <p:cond delay="0"/>
-                                  </p:stCondLst>
-                                  <p:childTnLst>
-                                    <p:set>
-                                      <p:cBhvr>
-                                        <p:cTn id="22" dur="1" fill="hold">
-                                          <p:stCondLst>
-                                            <p:cond delay="0"/>
-                                          </p:stCondLst>
-                                        </p:cTn>
-                                        <p:tgtEl>
-                                          <p:spTgt spid="224">
-                                            <p:txEl>
-                                              <p:pRg st="4" end="4"/>
-                                            </p:txEl>
-                                          </p:spTgt>
-                                        </p:tgtEl>
-                                        <p:attrNameLst>
-                                          <p:attrName>style.visibility</p:attrName>
-                                        </p:attrNameLst>
-                                      </p:cBhvr>
-                                      <p:to>
-                                        <p:strVal val="visible"/>
-                                      </p:to>
-                                    </p:set>
-                                  </p:childTnLst>
-                                </p:cTn>
-                              </p:par>
-                            </p:childTnLst>
-                          </p:cTn>
-                        </p:par>
-                      </p:childTnLst>
-                    </p:cTn>
-                  </p:par>
-                  <p:par>
-                    <p:cTn id="23" fill="hold">
-                      <p:stCondLst>
-                        <p:cond delay="indefinite"/>
-                      </p:stCondLst>
-                      <p:childTnLst>
-                        <p:par>
-                          <p:cTn id="24" fill="hold">
-                            <p:stCondLst>
-                              <p:cond delay="0"/>
-                            </p:stCondLst>
-                            <p:childTnLst>
-                              <p:par>
-                                <p:cTn id="25" presetID="1" presetClass="entr" presetSubtype="0" fill="hold" nodeType="clickEffect">
-                                  <p:stCondLst>
-                                    <p:cond delay="0"/>
-                                  </p:stCondLst>
-                                  <p:childTnLst>
-                                    <p:set>
-                                      <p:cBhvr>
-                                        <p:cTn id="26" dur="1" fill="hold">
-                                          <p:stCondLst>
-                                            <p:cond delay="0"/>
-                                          </p:stCondLst>
-                                        </p:cTn>
-                                        <p:tgtEl>
-                                          <p:spTgt spid="224">
-                                            <p:txEl>
-                                              <p:pRg st="5" end="5"/>
-                                            </p:txEl>
-                                          </p:spTgt>
-                                        </p:tgtEl>
-                                        <p:attrNameLst>
-                                          <p:attrName>style.visibility</p:attrName>
-                                        </p:attrNameLst>
-                                      </p:cBhvr>
-                                      <p:to>
-                                        <p:strVal val="visible"/>
-                                      </p:to>
-                                    </p:set>
-                                  </p:childTnLst>
-                                </p:cTn>
-                              </p:par>
-                            </p:childTnLst>
-                          </p:cTn>
-                        </p:par>
-                      </p:childTnLst>
-                    </p:cTn>
-                  </p:par>
-                  <p:par>
-                    <p:cTn id="27" fill="hold">
-                      <p:stCondLst>
-                        <p:cond delay="indefinite"/>
-                      </p:stCondLst>
-                      <p:childTnLst>
-                        <p:par>
-                          <p:cTn id="28" fill="hold">
-                            <p:stCondLst>
-                              <p:cond delay="0"/>
-                            </p:stCondLst>
-                            <p:childTnLst>
-                              <p:par>
-                                <p:cTn id="29" presetID="1" presetClass="entr" presetSubtype="0" fill="hold" nodeType="clickEffect">
-                                  <p:stCondLst>
-                                    <p:cond delay="0"/>
-                                  </p:stCondLst>
-                                  <p:childTnLst>
-                                    <p:set>
-                                      <p:cBhvr>
-                                        <p:cTn id="30" dur="1" fill="hold">
-                                          <p:stCondLst>
-                                            <p:cond delay="0"/>
-                                          </p:stCondLst>
-                                        </p:cTn>
-                                        <p:tgtEl>
-                                          <p:spTgt spid="2"/>
-                                        </p:tgtEl>
-                                        <p:attrNameLst>
-                                          <p:attrName>style.visibility</p:attrName>
-                                        </p:attrNameLst>
-                                      </p:cBhvr>
-                                      <p:to>
-                                        <p:strVal val="visible"/>
-                                      </p:to>
-                                    </p:set>
-                                  </p:childTnLst>
-                                </p:cTn>
-                              </p:par>
-                            </p:childTnLst>
-                          </p:cTn>
-                        </p:par>
-                      </p:childTnLst>
-                    </p:cTn>
-                  </p:par>
-                </p:childTnLst>
-              </p:cTn>
-              <p:prevCondLst>
-                <p:cond evt="onPrev" delay="0">
-                  <p:tgtEl>
-                    <p:sldTgt/>
-                  </p:tgtEl>
-                </p:cond>
-              </p:prevCondLst>
-              <p:nextCondLst>
-                <p:cond evt="onNext" delay="0">
-                  <p:tgtEl>
-                    <p:sldTgt/>
-                  </p:tgtEl>
-                </p:cond>
-              </p:nextCondLst>
-            </p:seq>
-          </p:childTnLst>
-        </p:cTn>
-      </p:par>
-    </p:tnLst>
-  </p:timing>
-</p:sld>
-</file>
-
-<file path=ppt/slides/slide7.xml><?xml version="1.0" encoding="utf-8"?>
-<p:sld xmlns:a="http://schemas.openxmlformats.org/drawingml/2006/main" xmlns:r="http://schemas.openxmlformats.org/officeDocument/2006/relationships" xmlns:p="http://schemas.openxmlformats.org/presentationml/2006/main">
-  <p:cSld>
-    <p:spTree>
-      <p:nvGrpSpPr>
-        <p:cNvPr id="1" name="Shape 222">
-          <a:extLst>
-            <a:ext uri="{FF2B5EF4-FFF2-40B4-BE49-F238E27FC236}">
               <a16:creationId xmlns:a16="http://schemas.microsoft.com/office/drawing/2014/main" id="{B44877E0-0172-F98F-D96E-773D648CBE9A}"/>
             </a:ext>
           </a:extLst>
@@ -46982,7 +46603,7 @@
               <a:buSzPts val="2000"/>
             </a:pPr>
             <a:r>
-              <a:rPr lang="en-CA" sz="2000"/>
+              <a:rPr lang="en-CA" sz="2000" dirty="0"/>
               <a:t>Also known as Backtracking. It models the search space as a tree and traverses it recursively.</a:t>
             </a:r>
           </a:p>
@@ -46994,7 +46615,7 @@
               <a:buSzPts val="2000"/>
             </a:pPr>
             <a:r>
-              <a:rPr lang="en-CA" sz="2000"/>
+              <a:rPr lang="en-CA" sz="2000" dirty="0"/>
               <a:t>When to use it:</a:t>
             </a:r>
           </a:p>
@@ -47006,7 +46627,7 @@
               <a:buSzPts val="2000"/>
             </a:pPr>
             <a:r>
-              <a:rPr lang="en-CA" sz="1800"/>
+              <a:rPr lang="en-CA" sz="1800" dirty="0"/>
               <a:t>When the number of nested loops is not known in advance, making iterative approaches impossible.</a:t>
             </a:r>
           </a:p>
@@ -47018,7 +46639,7 @@
               <a:buSzPts val="2000"/>
             </a:pPr>
             <a:r>
-              <a:rPr lang="en-CA" sz="2000"/>
+              <a:rPr lang="en-CA" sz="2000" dirty="0"/>
               <a:t>Key Components:</a:t>
             </a:r>
           </a:p>
@@ -47030,8 +46651,8 @@
               <a:buSzPts val="2000"/>
             </a:pPr>
             <a:r>
-              <a:rPr lang="en-CA" sz="1800"/>
-              <a:t>Base Case: The condition where a partial solution becomes a full valid solution (record or print it) or becomes invalid (terminate the recursion).</a:t>
+              <a:rPr lang="en-CA" sz="1800" dirty="0"/>
+              <a:t>Base Case: The condition where a partial solution becomes a full solution. Encapsulates the condition of the smallest problem instance. </a:t>
             </a:r>
           </a:p>
           <a:p>
@@ -47042,7 +46663,7 @@
               <a:buSzPts val="2000"/>
             </a:pPr>
             <a:r>
-              <a:rPr lang="en-CA" sz="1800"/>
+              <a:rPr lang="en-CA" sz="1800" dirty="0"/>
               <a:t>Recursive Step: The loop that tries all possible candidates for the current state and makes recursive calls to go deeper.</a:t>
             </a:r>
           </a:p>
@@ -47054,8 +46675,8 @@
               <a:buSzPts val="2000"/>
             </a:pPr>
             <a:r>
-              <a:rPr lang="en-CA" sz="2000"/>
-              <a:t>Filtering vs Generating: Backtracking generates solutions and stops exploring a branch the moment it becomes invalid, which is much faster than filtering all possibilities at the end.</a:t>
+              <a:rPr lang="en-CA" sz="2000" dirty="0"/>
+              <a:t>Filtering vs Generating: Backtracking generates solutions and stops exploring a branch the moment it becomes invalid, which is much faster than generating all possibilities and then filtering out the invalid solutions.</a:t>
             </a:r>
           </a:p>
         </p:txBody>
@@ -47446,7 +47067,7 @@
 </p:sld>
 </file>
 
-<file path=ppt/slides/slide8.xml><?xml version="1.0" encoding="utf-8"?>
+<file path=ppt/slides/slide7.xml><?xml version="1.0" encoding="utf-8"?>
 <p:sld xmlns:a="http://schemas.openxmlformats.org/drawingml/2006/main" xmlns:r="http://schemas.openxmlformats.org/officeDocument/2006/relationships" xmlns:p="http://schemas.openxmlformats.org/presentationml/2006/main">
   <p:cSld>
     <p:spTree>
@@ -47571,15 +47192,752 @@
           </a:bodyPr>
           <a:lstStyle/>
           <a:p>
-            <a:pPr lvl="0" indent="-355600">
+            <a:pPr indent="-355600">
               <a:spcBef>
                 <a:spcPts val="0"/>
               </a:spcBef>
               <a:buSzPts val="2000"/>
             </a:pPr>
             <a:r>
-              <a:rPr lang="en-US" sz="2000"/>
-              <a:t>The Goal: Place 8 queens on an 8×8 board without them attacking each other[cite: 1].</a:t>
+              <a:rPr lang="en-US" dirty="0"/>
+              <a:t>The Goal: Place 8 queens on an 8×8 board without them attacking each other.</a:t>
+            </a:r>
+            <a:endParaRPr lang="en-US" sz="1800" dirty="0"/>
+          </a:p>
+          <a:p>
+            <a:pPr lvl="0" indent="-355600">
+              <a:spcBef>
+                <a:spcPts val="0"/>
+              </a:spcBef>
+              <a:buSzPts val="2000"/>
+            </a:pPr>
+            <a:r>
+              <a:rPr lang="en-US" sz="1800" dirty="0"/>
+              <a:t>Try all possibilities, enumerate all combinations of 8 different cells out of the 8x8=64 possible cells!</a:t>
+            </a:r>
+          </a:p>
+          <a:p>
+            <a:pPr lvl="1" indent="-355600">
+              <a:spcBef>
+                <a:spcPts val="0"/>
+              </a:spcBef>
+              <a:buSzPts val="2000"/>
+            </a:pPr>
+            <a:r>
+              <a:rPr lang="en-US" dirty="0"/>
+              <a:t>64C8 about 4B possibilities</a:t>
+            </a:r>
+          </a:p>
+          <a:p>
+            <a:pPr indent="-355600">
+              <a:spcBef>
+                <a:spcPts val="0"/>
+              </a:spcBef>
+              <a:buSzPts val="2000"/>
+            </a:pPr>
+            <a:r>
+              <a:rPr lang="en-US" dirty="0"/>
+              <a:t>Prune the column? (queens can’t occupy same column)</a:t>
+            </a:r>
+          </a:p>
+          <a:p>
+            <a:pPr lvl="1" indent="-355600">
+              <a:spcBef>
+                <a:spcPts val="0"/>
+              </a:spcBef>
+              <a:buSzPts val="2000"/>
+            </a:pPr>
+            <a:r>
+              <a:rPr lang="en-US" dirty="0"/>
+              <a:t>8^8 about 17M possibilities</a:t>
+            </a:r>
+          </a:p>
+          <a:p>
+            <a:pPr indent="-355600">
+              <a:spcBef>
+                <a:spcPts val="0"/>
+              </a:spcBef>
+              <a:buSzPts val="2000"/>
+            </a:pPr>
+            <a:r>
+              <a:rPr lang="en-US" dirty="0"/>
+              <a:t>Prune column and row? </a:t>
+            </a:r>
+          </a:p>
+          <a:p>
+            <a:pPr lvl="1" indent="-355600">
+              <a:spcBef>
+                <a:spcPts val="0"/>
+              </a:spcBef>
+              <a:buSzPts val="2000"/>
+            </a:pPr>
+            <a:r>
+              <a:rPr lang="en-US" dirty="0"/>
+              <a:t>8! About 40k possibilities</a:t>
+            </a:r>
+          </a:p>
+          <a:p>
+            <a:pPr indent="-355600">
+              <a:spcBef>
+                <a:spcPts val="0"/>
+              </a:spcBef>
+              <a:buSzPts val="2000"/>
+            </a:pPr>
+            <a:r>
+              <a:rPr lang="en-US" dirty="0"/>
+              <a:t>Prune column, row and diagonals? Yes!</a:t>
+            </a:r>
+          </a:p>
+          <a:p>
+            <a:pPr lvl="1" indent="-355600">
+              <a:spcBef>
+                <a:spcPts val="0"/>
+              </a:spcBef>
+              <a:buSzPts val="2000"/>
+            </a:pPr>
+            <a:r>
+              <a:rPr lang="en-US" dirty="0"/>
+              <a:t>Sub-8! Possibilities</a:t>
+            </a:r>
+          </a:p>
+          <a:p>
+            <a:pPr lvl="1" indent="-355600">
+              <a:spcBef>
+                <a:spcPts val="0"/>
+              </a:spcBef>
+              <a:buSzPts val="2000"/>
+            </a:pPr>
+            <a:endParaRPr lang="en-US" dirty="0"/>
+          </a:p>
+          <a:p>
+            <a:pPr lvl="1" indent="-355600">
+              <a:spcBef>
+                <a:spcPts val="0"/>
+              </a:spcBef>
+              <a:buSzPts val="2000"/>
+            </a:pPr>
+            <a:endParaRPr lang="en-US" dirty="0"/>
+          </a:p>
+        </p:txBody>
+      </p:sp>
+    </p:spTree>
+    <p:extLst>
+      <p:ext uri="{BB962C8B-B14F-4D97-AF65-F5344CB8AC3E}">
+        <p14:creationId xmlns:p14="http://schemas.microsoft.com/office/powerpoint/2010/main" val="1609697094"/>
+      </p:ext>
+    </p:extLst>
+  </p:cSld>
+  <p:clrMapOvr>
+    <a:masterClrMapping/>
+  </p:clrMapOvr>
+  <p:timing>
+    <p:tnLst>
+      <p:par>
+        <p:cTn id="1" dur="indefinite" restart="never" nodeType="tmRoot">
+          <p:childTnLst>
+            <p:seq concurrent="1" nextAc="seek">
+              <p:cTn id="2" dur="indefinite" nodeType="mainSeq">
+                <p:childTnLst>
+                  <p:par>
+                    <p:cTn id="3" fill="hold">
+                      <p:stCondLst>
+                        <p:cond delay="indefinite"/>
+                      </p:stCondLst>
+                      <p:childTnLst>
+                        <p:par>
+                          <p:cTn id="4" fill="hold">
+                            <p:stCondLst>
+                              <p:cond delay="0"/>
+                            </p:stCondLst>
+                            <p:childTnLst>
+                              <p:par>
+                                <p:cTn id="5" presetID="1" presetClass="entr" presetSubtype="0" fill="hold" nodeType="clickEffect">
+                                  <p:stCondLst>
+                                    <p:cond delay="0"/>
+                                  </p:stCondLst>
+                                  <p:childTnLst>
+                                    <p:set>
+                                      <p:cBhvr>
+                                        <p:cTn id="6" dur="1" fill="hold">
+                                          <p:stCondLst>
+                                            <p:cond delay="0"/>
+                                          </p:stCondLst>
+                                        </p:cTn>
+                                        <p:tgtEl>
+                                          <p:spTgt spid="224">
+                                            <p:txEl>
+                                              <p:pRg st="1" end="1"/>
+                                            </p:txEl>
+                                          </p:spTgt>
+                                        </p:tgtEl>
+                                        <p:attrNameLst>
+                                          <p:attrName>style.visibility</p:attrName>
+                                        </p:attrNameLst>
+                                      </p:cBhvr>
+                                      <p:to>
+                                        <p:strVal val="visible"/>
+                                      </p:to>
+                                    </p:set>
+                                  </p:childTnLst>
+                                </p:cTn>
+                              </p:par>
+                            </p:childTnLst>
+                          </p:cTn>
+                        </p:par>
+                      </p:childTnLst>
+                    </p:cTn>
+                  </p:par>
+                  <p:par>
+                    <p:cTn id="7" fill="hold">
+                      <p:stCondLst>
+                        <p:cond delay="indefinite"/>
+                      </p:stCondLst>
+                      <p:childTnLst>
+                        <p:par>
+                          <p:cTn id="8" fill="hold">
+                            <p:stCondLst>
+                              <p:cond delay="0"/>
+                            </p:stCondLst>
+                            <p:childTnLst>
+                              <p:par>
+                                <p:cTn id="9" presetID="1" presetClass="entr" presetSubtype="0" fill="hold" nodeType="clickEffect">
+                                  <p:stCondLst>
+                                    <p:cond delay="0"/>
+                                  </p:stCondLst>
+                                  <p:childTnLst>
+                                    <p:set>
+                                      <p:cBhvr>
+                                        <p:cTn id="10" dur="1" fill="hold">
+                                          <p:stCondLst>
+                                            <p:cond delay="0"/>
+                                          </p:stCondLst>
+                                        </p:cTn>
+                                        <p:tgtEl>
+                                          <p:spTgt spid="224">
+                                            <p:txEl>
+                                              <p:pRg st="0" end="0"/>
+                                            </p:txEl>
+                                          </p:spTgt>
+                                        </p:tgtEl>
+                                        <p:attrNameLst>
+                                          <p:attrName>style.visibility</p:attrName>
+                                        </p:attrNameLst>
+                                      </p:cBhvr>
+                                      <p:to>
+                                        <p:strVal val="visible"/>
+                                      </p:to>
+                                    </p:set>
+                                  </p:childTnLst>
+                                </p:cTn>
+                              </p:par>
+                            </p:childTnLst>
+                          </p:cTn>
+                        </p:par>
+                      </p:childTnLst>
+                    </p:cTn>
+                  </p:par>
+                  <p:par>
+                    <p:cTn id="11" fill="hold">
+                      <p:stCondLst>
+                        <p:cond delay="indefinite"/>
+                      </p:stCondLst>
+                      <p:childTnLst>
+                        <p:par>
+                          <p:cTn id="12" fill="hold">
+                            <p:stCondLst>
+                              <p:cond delay="0"/>
+                            </p:stCondLst>
+                            <p:childTnLst>
+                              <p:par>
+                                <p:cTn id="13" presetID="1" presetClass="entr" presetSubtype="0" fill="hold" nodeType="clickEffect">
+                                  <p:stCondLst>
+                                    <p:cond delay="0"/>
+                                  </p:stCondLst>
+                                  <p:childTnLst>
+                                    <p:set>
+                                      <p:cBhvr>
+                                        <p:cTn id="14" dur="1" fill="hold">
+                                          <p:stCondLst>
+                                            <p:cond delay="0"/>
+                                          </p:stCondLst>
+                                        </p:cTn>
+                                        <p:tgtEl>
+                                          <p:spTgt spid="224">
+                                            <p:txEl>
+                                              <p:pRg st="2" end="2"/>
+                                            </p:txEl>
+                                          </p:spTgt>
+                                        </p:tgtEl>
+                                        <p:attrNameLst>
+                                          <p:attrName>style.visibility</p:attrName>
+                                        </p:attrNameLst>
+                                      </p:cBhvr>
+                                      <p:to>
+                                        <p:strVal val="visible"/>
+                                      </p:to>
+                                    </p:set>
+                                  </p:childTnLst>
+                                </p:cTn>
+                              </p:par>
+                            </p:childTnLst>
+                          </p:cTn>
+                        </p:par>
+                      </p:childTnLst>
+                    </p:cTn>
+                  </p:par>
+                  <p:par>
+                    <p:cTn id="15" fill="hold">
+                      <p:stCondLst>
+                        <p:cond delay="indefinite"/>
+                      </p:stCondLst>
+                      <p:childTnLst>
+                        <p:par>
+                          <p:cTn id="16" fill="hold">
+                            <p:stCondLst>
+                              <p:cond delay="0"/>
+                            </p:stCondLst>
+                            <p:childTnLst>
+                              <p:par>
+                                <p:cTn id="17" presetID="1" presetClass="entr" presetSubtype="0" fill="hold" nodeType="clickEffect">
+                                  <p:stCondLst>
+                                    <p:cond delay="0"/>
+                                  </p:stCondLst>
+                                  <p:childTnLst>
+                                    <p:set>
+                                      <p:cBhvr>
+                                        <p:cTn id="18" dur="1" fill="hold">
+                                          <p:stCondLst>
+                                            <p:cond delay="0"/>
+                                          </p:stCondLst>
+                                        </p:cTn>
+                                        <p:tgtEl>
+                                          <p:spTgt spid="224">
+                                            <p:txEl>
+                                              <p:pRg st="3" end="3"/>
+                                            </p:txEl>
+                                          </p:spTgt>
+                                        </p:tgtEl>
+                                        <p:attrNameLst>
+                                          <p:attrName>style.visibility</p:attrName>
+                                        </p:attrNameLst>
+                                      </p:cBhvr>
+                                      <p:to>
+                                        <p:strVal val="visible"/>
+                                      </p:to>
+                                    </p:set>
+                                  </p:childTnLst>
+                                </p:cTn>
+                              </p:par>
+                            </p:childTnLst>
+                          </p:cTn>
+                        </p:par>
+                      </p:childTnLst>
+                    </p:cTn>
+                  </p:par>
+                  <p:par>
+                    <p:cTn id="19" fill="hold">
+                      <p:stCondLst>
+                        <p:cond delay="indefinite"/>
+                      </p:stCondLst>
+                      <p:childTnLst>
+                        <p:par>
+                          <p:cTn id="20" fill="hold">
+                            <p:stCondLst>
+                              <p:cond delay="0"/>
+                            </p:stCondLst>
+                            <p:childTnLst>
+                              <p:par>
+                                <p:cTn id="21" presetID="1" presetClass="entr" presetSubtype="0" fill="hold" nodeType="clickEffect">
+                                  <p:stCondLst>
+                                    <p:cond delay="0"/>
+                                  </p:stCondLst>
+                                  <p:childTnLst>
+                                    <p:set>
+                                      <p:cBhvr>
+                                        <p:cTn id="22" dur="1" fill="hold">
+                                          <p:stCondLst>
+                                            <p:cond delay="0"/>
+                                          </p:stCondLst>
+                                        </p:cTn>
+                                        <p:tgtEl>
+                                          <p:spTgt spid="224">
+                                            <p:txEl>
+                                              <p:pRg st="4" end="4"/>
+                                            </p:txEl>
+                                          </p:spTgt>
+                                        </p:tgtEl>
+                                        <p:attrNameLst>
+                                          <p:attrName>style.visibility</p:attrName>
+                                        </p:attrNameLst>
+                                      </p:cBhvr>
+                                      <p:to>
+                                        <p:strVal val="visible"/>
+                                      </p:to>
+                                    </p:set>
+                                  </p:childTnLst>
+                                </p:cTn>
+                              </p:par>
+                            </p:childTnLst>
+                          </p:cTn>
+                        </p:par>
+                      </p:childTnLst>
+                    </p:cTn>
+                  </p:par>
+                  <p:par>
+                    <p:cTn id="23" fill="hold">
+                      <p:stCondLst>
+                        <p:cond delay="indefinite"/>
+                      </p:stCondLst>
+                      <p:childTnLst>
+                        <p:par>
+                          <p:cTn id="24" fill="hold">
+                            <p:stCondLst>
+                              <p:cond delay="0"/>
+                            </p:stCondLst>
+                            <p:childTnLst>
+                              <p:par>
+                                <p:cTn id="25" presetID="1" presetClass="entr" presetSubtype="0" fill="hold" nodeType="clickEffect">
+                                  <p:stCondLst>
+                                    <p:cond delay="0"/>
+                                  </p:stCondLst>
+                                  <p:childTnLst>
+                                    <p:set>
+                                      <p:cBhvr>
+                                        <p:cTn id="26" dur="1" fill="hold">
+                                          <p:stCondLst>
+                                            <p:cond delay="0"/>
+                                          </p:stCondLst>
+                                        </p:cTn>
+                                        <p:tgtEl>
+                                          <p:spTgt spid="224">
+                                            <p:txEl>
+                                              <p:pRg st="5" end="5"/>
+                                            </p:txEl>
+                                          </p:spTgt>
+                                        </p:tgtEl>
+                                        <p:attrNameLst>
+                                          <p:attrName>style.visibility</p:attrName>
+                                        </p:attrNameLst>
+                                      </p:cBhvr>
+                                      <p:to>
+                                        <p:strVal val="visible"/>
+                                      </p:to>
+                                    </p:set>
+                                  </p:childTnLst>
+                                </p:cTn>
+                              </p:par>
+                            </p:childTnLst>
+                          </p:cTn>
+                        </p:par>
+                      </p:childTnLst>
+                    </p:cTn>
+                  </p:par>
+                  <p:par>
+                    <p:cTn id="27" fill="hold">
+                      <p:stCondLst>
+                        <p:cond delay="indefinite"/>
+                      </p:stCondLst>
+                      <p:childTnLst>
+                        <p:par>
+                          <p:cTn id="28" fill="hold">
+                            <p:stCondLst>
+                              <p:cond delay="0"/>
+                            </p:stCondLst>
+                            <p:childTnLst>
+                              <p:par>
+                                <p:cTn id="29" presetID="1" presetClass="entr" presetSubtype="0" fill="hold" nodeType="clickEffect">
+                                  <p:stCondLst>
+                                    <p:cond delay="0"/>
+                                  </p:stCondLst>
+                                  <p:childTnLst>
+                                    <p:set>
+                                      <p:cBhvr>
+                                        <p:cTn id="30" dur="1" fill="hold">
+                                          <p:stCondLst>
+                                            <p:cond delay="0"/>
+                                          </p:stCondLst>
+                                        </p:cTn>
+                                        <p:tgtEl>
+                                          <p:spTgt spid="224">
+                                            <p:txEl>
+                                              <p:pRg st="6" end="6"/>
+                                            </p:txEl>
+                                          </p:spTgt>
+                                        </p:tgtEl>
+                                        <p:attrNameLst>
+                                          <p:attrName>style.visibility</p:attrName>
+                                        </p:attrNameLst>
+                                      </p:cBhvr>
+                                      <p:to>
+                                        <p:strVal val="visible"/>
+                                      </p:to>
+                                    </p:set>
+                                  </p:childTnLst>
+                                </p:cTn>
+                              </p:par>
+                            </p:childTnLst>
+                          </p:cTn>
+                        </p:par>
+                      </p:childTnLst>
+                    </p:cTn>
+                  </p:par>
+                  <p:par>
+                    <p:cTn id="31" fill="hold">
+                      <p:stCondLst>
+                        <p:cond delay="indefinite"/>
+                      </p:stCondLst>
+                      <p:childTnLst>
+                        <p:par>
+                          <p:cTn id="32" fill="hold">
+                            <p:stCondLst>
+                              <p:cond delay="0"/>
+                            </p:stCondLst>
+                            <p:childTnLst>
+                              <p:par>
+                                <p:cTn id="33" presetID="1" presetClass="entr" presetSubtype="0" fill="hold" nodeType="clickEffect">
+                                  <p:stCondLst>
+                                    <p:cond delay="0"/>
+                                  </p:stCondLst>
+                                  <p:childTnLst>
+                                    <p:set>
+                                      <p:cBhvr>
+                                        <p:cTn id="34" dur="1" fill="hold">
+                                          <p:stCondLst>
+                                            <p:cond delay="0"/>
+                                          </p:stCondLst>
+                                        </p:cTn>
+                                        <p:tgtEl>
+                                          <p:spTgt spid="224">
+                                            <p:txEl>
+                                              <p:pRg st="7" end="7"/>
+                                            </p:txEl>
+                                          </p:spTgt>
+                                        </p:tgtEl>
+                                        <p:attrNameLst>
+                                          <p:attrName>style.visibility</p:attrName>
+                                        </p:attrNameLst>
+                                      </p:cBhvr>
+                                      <p:to>
+                                        <p:strVal val="visible"/>
+                                      </p:to>
+                                    </p:set>
+                                  </p:childTnLst>
+                                </p:cTn>
+                              </p:par>
+                            </p:childTnLst>
+                          </p:cTn>
+                        </p:par>
+                      </p:childTnLst>
+                    </p:cTn>
+                  </p:par>
+                  <p:par>
+                    <p:cTn id="35" fill="hold">
+                      <p:stCondLst>
+                        <p:cond delay="indefinite"/>
+                      </p:stCondLst>
+                      <p:childTnLst>
+                        <p:par>
+                          <p:cTn id="36" fill="hold">
+                            <p:stCondLst>
+                              <p:cond delay="0"/>
+                            </p:stCondLst>
+                            <p:childTnLst>
+                              <p:par>
+                                <p:cTn id="37" presetID="1" presetClass="entr" presetSubtype="0" fill="hold" nodeType="clickEffect">
+                                  <p:stCondLst>
+                                    <p:cond delay="0"/>
+                                  </p:stCondLst>
+                                  <p:childTnLst>
+                                    <p:set>
+                                      <p:cBhvr>
+                                        <p:cTn id="38" dur="1" fill="hold">
+                                          <p:stCondLst>
+                                            <p:cond delay="0"/>
+                                          </p:stCondLst>
+                                        </p:cTn>
+                                        <p:tgtEl>
+                                          <p:spTgt spid="224">
+                                            <p:txEl>
+                                              <p:pRg st="8" end="8"/>
+                                            </p:txEl>
+                                          </p:spTgt>
+                                        </p:tgtEl>
+                                        <p:attrNameLst>
+                                          <p:attrName>style.visibility</p:attrName>
+                                        </p:attrNameLst>
+                                      </p:cBhvr>
+                                      <p:to>
+                                        <p:strVal val="visible"/>
+                                      </p:to>
+                                    </p:set>
+                                  </p:childTnLst>
+                                </p:cTn>
+                              </p:par>
+                            </p:childTnLst>
+                          </p:cTn>
+                        </p:par>
+                      </p:childTnLst>
+                    </p:cTn>
+                  </p:par>
+                </p:childTnLst>
+              </p:cTn>
+              <p:prevCondLst>
+                <p:cond evt="onPrev" delay="0">
+                  <p:tgtEl>
+                    <p:sldTgt/>
+                  </p:tgtEl>
+                </p:cond>
+              </p:prevCondLst>
+              <p:nextCondLst>
+                <p:cond evt="onNext" delay="0">
+                  <p:tgtEl>
+                    <p:sldTgt/>
+                  </p:tgtEl>
+                </p:cond>
+              </p:nextCondLst>
+            </p:seq>
+          </p:childTnLst>
+        </p:cTn>
+      </p:par>
+    </p:tnLst>
+  </p:timing>
+</p:sld>
+</file>
+
+<file path=ppt/slides/slide8.xml><?xml version="1.0" encoding="utf-8"?>
+<p:sld xmlns:a="http://schemas.openxmlformats.org/drawingml/2006/main" xmlns:r="http://schemas.openxmlformats.org/officeDocument/2006/relationships" xmlns:p="http://schemas.openxmlformats.org/presentationml/2006/main">
+  <p:cSld>
+    <p:spTree>
+      <p:nvGrpSpPr>
+        <p:cNvPr id="1" name="Shape 222">
+          <a:extLst>
+            <a:ext uri="{FF2B5EF4-FFF2-40B4-BE49-F238E27FC236}">
+              <a16:creationId xmlns:a16="http://schemas.microsoft.com/office/drawing/2014/main" id="{E369706C-08D9-4025-AF43-894334A1DBD2}"/>
+            </a:ext>
+          </a:extLst>
+        </p:cNvPr>
+        <p:cNvGrpSpPr/>
+        <p:nvPr/>
+      </p:nvGrpSpPr>
+      <p:grpSpPr>
+        <a:xfrm>
+          <a:off x="0" y="0"/>
+          <a:ext cx="0" cy="0"/>
+          <a:chOff x="0" y="0"/>
+          <a:chExt cx="0" cy="0"/>
+        </a:xfrm>
+      </p:grpSpPr>
+      <p:sp>
+        <p:nvSpPr>
+          <p:cNvPr id="223" name="Google Shape;223;g37c4946a550_0_194">
+            <a:extLst>
+              <a:ext uri="{FF2B5EF4-FFF2-40B4-BE49-F238E27FC236}">
+                <a16:creationId xmlns:a16="http://schemas.microsoft.com/office/drawing/2014/main" id="{FFEF1FEE-ECF7-4E5D-6022-6DD7BB84F069}"/>
+              </a:ext>
+            </a:extLst>
+          </p:cNvPr>
+          <p:cNvSpPr txBox="1">
+            <a:spLocks noGrp="1"/>
+          </p:cNvSpPr>
+          <p:nvPr>
+            <p:ph type="title"/>
+          </p:nvPr>
+        </p:nvSpPr>
+        <p:spPr>
+          <a:xfrm>
+            <a:off x="2231136" y="228421"/>
+            <a:ext cx="7729800" cy="662100"/>
+          </a:xfrm>
+          <a:prstGeom prst="rect">
+            <a:avLst/>
+          </a:prstGeom>
+          <a:solidFill>
+            <a:srgbClr val="FFFFFF"/>
+          </a:solidFill>
+          <a:ln w="31750" cap="sq" cmpd="sng">
+            <a:solidFill>
+              <a:srgbClr val="404040"/>
+            </a:solidFill>
+            <a:prstDash val="solid"/>
+            <a:miter lim="800000"/>
+            <a:headEnd type="none" w="sm" len="sm"/>
+            <a:tailEnd type="none" w="sm" len="sm"/>
+          </a:ln>
+        </p:spPr>
+        <p:txBody>
+          <a:bodyPr spcFirstLastPara="1" wrap="square" lIns="182875" tIns="182875" rIns="182875" bIns="182875" anchor="ctr" anchorCtr="0">
+            <a:normAutofit fontScale="90000"/>
+          </a:bodyPr>
+          <a:lstStyle/>
+          <a:p>
+            <a:pPr marL="0" lvl="0" indent="0" algn="ctr" rtl="0">
+              <a:lnSpc>
+                <a:spcPct val="90000"/>
+              </a:lnSpc>
+              <a:spcBef>
+                <a:spcPts val="0"/>
+              </a:spcBef>
+              <a:spcAft>
+                <a:spcPts val="0"/>
+              </a:spcAft>
+              <a:buClr>
+                <a:srgbClr val="262626"/>
+              </a:buClr>
+              <a:buSzPct val="100000"/>
+              <a:buFont typeface="Gill Sans"/>
+              <a:buNone/>
+            </a:pPr>
+            <a:r>
+              <a:rPr lang="en-US" dirty="0"/>
+              <a:t>Code Example: 8-Queens (Python)</a:t>
+            </a:r>
+          </a:p>
+        </p:txBody>
+      </p:sp>
+      <p:sp>
+        <p:nvSpPr>
+          <p:cNvPr id="224" name="Google Shape;224;g37c4946a550_0_194">
+            <a:extLst>
+              <a:ext uri="{FF2B5EF4-FFF2-40B4-BE49-F238E27FC236}">
+                <a16:creationId xmlns:a16="http://schemas.microsoft.com/office/drawing/2014/main" id="{2261643A-50E3-628B-4EC6-7A4C0934E630}"/>
+              </a:ext>
+            </a:extLst>
+          </p:cNvPr>
+          <p:cNvSpPr txBox="1">
+            <a:spLocks noGrp="1"/>
+          </p:cNvSpPr>
+          <p:nvPr>
+            <p:ph type="body" idx="1"/>
+          </p:nvPr>
+        </p:nvSpPr>
+        <p:spPr>
+          <a:xfrm>
+            <a:off x="494675" y="1096824"/>
+            <a:ext cx="11231400" cy="4946789"/>
+          </a:xfrm>
+          <a:prstGeom prst="rect">
+            <a:avLst/>
+          </a:prstGeom>
+          <a:noFill/>
+          <a:ln>
+            <a:noFill/>
+          </a:ln>
+        </p:spPr>
+        <p:txBody>
+          <a:bodyPr spcFirstLastPara="1" wrap="square" lIns="91425" tIns="45700" rIns="91425" bIns="45700" anchor="t" anchorCtr="0">
+            <a:normAutofit/>
+          </a:bodyPr>
+          <a:lstStyle/>
+          <a:p>
+            <a:pPr lvl="0" indent="-355600">
+              <a:spcBef>
+                <a:spcPts val="0"/>
+              </a:spcBef>
+              <a:buSzPts val="2000"/>
+            </a:pPr>
+            <a:r>
+              <a:rPr lang="en-US" sz="2000" dirty="0"/>
+              <a:t>The Goal: Place 8 queens on an 8×8 board without them attacking each other.</a:t>
             </a:r>
           </a:p>
           <a:p>
@@ -47590,23 +47948,23 @@
               <a:buSzPts val="2000"/>
             </a:pPr>
             <a:r>
-              <a:rPr lang="en-US" sz="2000"/>
+              <a:rPr lang="en-US" sz="2000" dirty="0"/>
               <a:t>The Recursive State: </a:t>
             </a:r>
             <a:r>
-              <a:rPr lang="en-US" sz="2000" err="1"/>
+              <a:rPr lang="en-US" sz="2000" dirty="0" err="1"/>
               <a:t>place_queen</a:t>
             </a:r>
             <a:r>
-              <a:rPr lang="en-US" sz="2000"/>
+              <a:rPr lang="en-US" sz="2000" dirty="0"/>
               <a:t>(</a:t>
             </a:r>
             <a:r>
-              <a:rPr lang="en-US" sz="2000" err="1"/>
+              <a:rPr lang="en-US" sz="2000" dirty="0" err="1"/>
               <a:t>column_index</a:t>
             </a:r>
             <a:r>
-              <a:rPr lang="en-US" sz="2000"/>
+              <a:rPr lang="en-US" sz="2000" dirty="0"/>
               <a:t>)</a:t>
             </a:r>
           </a:p>
@@ -47618,7 +47976,7 @@
               <a:buSzPts val="2000"/>
             </a:pPr>
             <a:r>
-              <a:rPr lang="en-US" sz="2000"/>
+              <a:rPr lang="en-US" sz="2000" dirty="0"/>
               <a:t>The Logic:</a:t>
             </a:r>
           </a:p>
@@ -47630,20 +47988,20 @@
               <a:buSzPts val="2000"/>
             </a:pPr>
             <a:r>
-              <a:rPr lang="en-US" sz="1800" b="1"/>
+              <a:rPr lang="en-US" sz="1800" b="1" dirty="0"/>
               <a:t>Base Case</a:t>
             </a:r>
             <a:r>
-              <a:rPr lang="en-US" sz="1800"/>
+              <a:rPr lang="en-US" sz="1800" dirty="0"/>
               <a:t>: If </a:t>
             </a:r>
             <a:r>
-              <a:rPr lang="en-US" sz="1800" err="1"/>
+              <a:rPr lang="en-US" sz="1800" dirty="0" err="1"/>
               <a:t>column_index</a:t>
             </a:r>
             <a:r>
-              <a:rPr lang="en-US" sz="1800"/>
-              <a:t> == 8, all queens are placed. We found a valid arrangement[cite: 1]! Record it and return.</a:t>
+              <a:rPr lang="en-US" sz="1800" dirty="0"/>
+              <a:t> == 8, all queens are placed. We found a valid arrangement! Record it and return.</a:t>
             </a:r>
           </a:p>
           <a:p>
@@ -47654,11 +48012,11 @@
               <a:buSzPts val="2000"/>
             </a:pPr>
             <a:r>
-              <a:rPr lang="en-US" sz="1800" b="1"/>
+              <a:rPr lang="en-US" sz="1800" b="1" dirty="0"/>
               <a:t>Recursive Step</a:t>
             </a:r>
             <a:r>
-              <a:rPr lang="en-US" sz="1800"/>
+              <a:rPr lang="en-US" sz="1800" dirty="0"/>
               <a:t>:</a:t>
             </a:r>
           </a:p>
@@ -47670,7 +48028,7 @@
               <a:buSzPts val="2000"/>
             </a:pPr>
             <a:r>
-              <a:rPr lang="en-US" sz="1800"/>
+              <a:rPr lang="en-US" sz="1800" dirty="0"/>
               <a:t>Loop through rows 0 to 7.</a:t>
             </a:r>
           </a:p>
@@ -47682,15 +48040,15 @@
               <a:buSzPts val="2000"/>
             </a:pPr>
             <a:r>
-              <a:rPr lang="en-US" sz="1800"/>
+              <a:rPr lang="en-US" sz="1800" dirty="0"/>
               <a:t>Check if placing a queen at (row, </a:t>
             </a:r>
             <a:r>
-              <a:rPr lang="en-US" sz="1800" err="1"/>
+              <a:rPr lang="en-US" sz="1800" dirty="0" err="1"/>
               <a:t>column_index</a:t>
             </a:r>
             <a:r>
-              <a:rPr lang="en-US" sz="1800"/>
+              <a:rPr lang="en-US" sz="1800" dirty="0"/>
               <a:t>) is safe.</a:t>
             </a:r>
           </a:p>
@@ -47702,23 +48060,23 @@
               <a:buSzPts val="2000"/>
             </a:pPr>
             <a:r>
-              <a:rPr lang="en-US" sz="1800"/>
+              <a:rPr lang="en-US" sz="1800" dirty="0"/>
               <a:t>If safe, place the queen and recursively call </a:t>
             </a:r>
             <a:r>
-              <a:rPr lang="en-US" sz="1800" err="1"/>
+              <a:rPr lang="en-US" sz="1800" dirty="0" err="1"/>
               <a:t>place_queen</a:t>
             </a:r>
             <a:r>
-              <a:rPr lang="en-US" sz="1800"/>
+              <a:rPr lang="en-US" sz="1800" dirty="0"/>
               <a:t>(</a:t>
             </a:r>
             <a:r>
-              <a:rPr lang="en-US" sz="1800" err="1"/>
+              <a:rPr lang="en-US" sz="1800" dirty="0" err="1"/>
               <a:t>column_index</a:t>
             </a:r>
             <a:r>
-              <a:rPr lang="en-US" sz="1800"/>
+              <a:rPr lang="en-US" sz="1800" dirty="0"/>
               <a:t> + 1).</a:t>
             </a:r>
           </a:p>
@@ -47730,11 +48088,11 @@
               <a:buSzPts val="2000"/>
             </a:pPr>
             <a:r>
-              <a:rPr lang="en-US" sz="1800" b="1"/>
+              <a:rPr lang="en-US" sz="1800" b="1" dirty="0"/>
               <a:t>Backtrack</a:t>
             </a:r>
             <a:r>
-              <a:rPr lang="en-US" sz="1800"/>
+              <a:rPr lang="en-US" sz="1800" dirty="0"/>
               <a:t>: Remove the queen we just placed to try the next row in the loop.</a:t>
             </a:r>
           </a:p>
@@ -47745,7 +48103,7 @@
           <p:cNvPr id="2" name="Picture 1">
             <a:extLst>
               <a:ext uri="{FF2B5EF4-FFF2-40B4-BE49-F238E27FC236}">
-                <a16:creationId xmlns:a16="http://schemas.microsoft.com/office/drawing/2014/main" id="{C9167CEF-ECE4-ADA7-6FC8-E8361C796E8D}"/>
+                <a16:creationId xmlns:a16="http://schemas.microsoft.com/office/drawing/2014/main" id="{EF1F26B0-2C4C-4856-7E13-9122E3240EF4}"/>
               </a:ext>
             </a:extLst>
           </p:cNvPr>
@@ -47776,7 +48134,7 @@
           <p:cNvPr id="3" name="Picture 2">
             <a:extLst>
               <a:ext uri="{FF2B5EF4-FFF2-40B4-BE49-F238E27FC236}">
-                <a16:creationId xmlns:a16="http://schemas.microsoft.com/office/drawing/2014/main" id="{F948062B-07FE-2D24-36D6-193EC9D25E75}"/>
+                <a16:creationId xmlns:a16="http://schemas.microsoft.com/office/drawing/2014/main" id="{48F9B7A3-CF90-0226-5C61-B72E57963190}"/>
               </a:ext>
             </a:extLst>
           </p:cNvPr>
@@ -47805,7 +48163,7 @@
     </p:spTree>
     <p:extLst>
       <p:ext uri="{BB962C8B-B14F-4D97-AF65-F5344CB8AC3E}">
-        <p14:creationId xmlns:p14="http://schemas.microsoft.com/office/powerpoint/2010/main" val="1609697094"/>
+        <p14:creationId xmlns:p14="http://schemas.microsoft.com/office/powerpoint/2010/main" val="374046560"/>
       </p:ext>
     </p:extLst>
   </p:cSld>
